--- a/public/lessons/year-6-maths/summer/week-25/find-missing-dimensions/teaching-powerpoint-v1.pptx
+++ b/public/lessons/year-6-maths/summer/week-25/find-missing-dimensions/teaching-powerpoint-v1.pptx
@@ -2,24 +2,24 @@
 <file path=ppt/presentation.xml><?xml version="1.0" encoding="utf-8"?>
 <p:presentation xmlns:p="http://schemas.openxmlformats.org/presentationml/2006/main">
   <p:sldMasterIdLst>
-    <p:sldMasterId xmlns:r="http://schemas.openxmlformats.org/officeDocument/2006/relationships" id="2147483648" r:id="R89161a150db04565"/>
+    <p:sldMasterId xmlns:r="http://schemas.openxmlformats.org/officeDocument/2006/relationships" id="2147483648" r:id="Reff31580266a4a8f"/>
   </p:sldMasterIdLst>
   <p:notesMasterIdLst>
-    <p:notesMasterId xmlns:r="http://schemas.openxmlformats.org/officeDocument/2006/relationships" r:id="R4d2ecbd8bdc94f97"/>
+    <p:notesMasterId xmlns:r="http://schemas.openxmlformats.org/officeDocument/2006/relationships" r:id="R378ca3dcf49b4b2f"/>
   </p:notesMasterIdLst>
   <p:sldIdLst>
-    <p:sldId xmlns:r="http://schemas.openxmlformats.org/officeDocument/2006/relationships" id="256" r:id="Ra4d3ba6a41514cdd"/>
-    <p:sldId xmlns:r="http://schemas.openxmlformats.org/officeDocument/2006/relationships" id="257" r:id="Ra37be44f700a4879"/>
-    <p:sldId xmlns:r="http://schemas.openxmlformats.org/officeDocument/2006/relationships" id="258" r:id="Rac169168232341d7"/>
-    <p:sldId xmlns:r="http://schemas.openxmlformats.org/officeDocument/2006/relationships" id="259" r:id="R90db1d5a6e6849cd"/>
-    <p:sldId xmlns:r="http://schemas.openxmlformats.org/officeDocument/2006/relationships" id="260" r:id="R6fb192d769554521"/>
-    <p:sldId xmlns:r="http://schemas.openxmlformats.org/officeDocument/2006/relationships" id="261" r:id="R7afe72c9d7c24c63"/>
-    <p:sldId xmlns:r="http://schemas.openxmlformats.org/officeDocument/2006/relationships" id="262" r:id="R71b2ee92e770427f"/>
-    <p:sldId xmlns:r="http://schemas.openxmlformats.org/officeDocument/2006/relationships" id="263" r:id="Rbdbe850f00424984"/>
-    <p:sldId xmlns:r="http://schemas.openxmlformats.org/officeDocument/2006/relationships" id="264" r:id="R1c4d6f7a464a46bb"/>
-    <p:sldId xmlns:r="http://schemas.openxmlformats.org/officeDocument/2006/relationships" id="265" r:id="R827877b904334834"/>
-    <p:sldId xmlns:r="http://schemas.openxmlformats.org/officeDocument/2006/relationships" id="266" r:id="R8d8d4d6414af44fa"/>
-    <p:sldId xmlns:r="http://schemas.openxmlformats.org/officeDocument/2006/relationships" id="267" r:id="Rbd77df32f2534c27"/>
+    <p:sldId xmlns:r="http://schemas.openxmlformats.org/officeDocument/2006/relationships" id="256" r:id="Rbbb3d161c5914425"/>
+    <p:sldId xmlns:r="http://schemas.openxmlformats.org/officeDocument/2006/relationships" id="257" r:id="Rcb6551a5e78b4efa"/>
+    <p:sldId xmlns:r="http://schemas.openxmlformats.org/officeDocument/2006/relationships" id="258" r:id="R392059579b144ce7"/>
+    <p:sldId xmlns:r="http://schemas.openxmlformats.org/officeDocument/2006/relationships" id="259" r:id="Rd32dc34a522e4b85"/>
+    <p:sldId xmlns:r="http://schemas.openxmlformats.org/officeDocument/2006/relationships" id="260" r:id="R13f7e99579104c24"/>
+    <p:sldId xmlns:r="http://schemas.openxmlformats.org/officeDocument/2006/relationships" id="261" r:id="R0c3216d50b084a8a"/>
+    <p:sldId xmlns:r="http://schemas.openxmlformats.org/officeDocument/2006/relationships" id="262" r:id="R30621950882e458d"/>
+    <p:sldId xmlns:r="http://schemas.openxmlformats.org/officeDocument/2006/relationships" id="263" r:id="Ra8b596590d714642"/>
+    <p:sldId xmlns:r="http://schemas.openxmlformats.org/officeDocument/2006/relationships" id="264" r:id="R537102dff63646e4"/>
+    <p:sldId xmlns:r="http://schemas.openxmlformats.org/officeDocument/2006/relationships" id="265" r:id="R606b2fa76e8d4284"/>
+    <p:sldId xmlns:r="http://schemas.openxmlformats.org/officeDocument/2006/relationships" id="266" r:id="R34d640eb481a4349"/>
+    <p:sldId xmlns:r="http://schemas.openxmlformats.org/officeDocument/2006/relationships" id="267" r:id="R4b2c252a82e04380"/>
   </p:sldIdLst>
   <p:sldSz cx="12192000" cy="6858000"/>
   <p:notesSz cx="6858000" cy="9144000"/>
@@ -873,7 +873,7 @@
           <a:lstStyle xmlns:a="http://schemas.openxmlformats.org/drawingml/2006/main"/>
           <a:p xmlns:a="http://schemas.openxmlformats.org/drawingml/2006/main">
             <a:r>
-              <a:t>I do. Reveal the question, setup and each calculation stage one click at a time. Pupils watch before copying. Model answer: 6 cm.</a:t>
+              <a:t>I do. Reveal the question, then reveal each mathematical change one click at a time. Point to the numbers and operation that changed before moving to the next line. Final answer: 6 cm.</a:t>
             </a:r>
           </a:p>
         </p:txBody>
@@ -1291,7 +1291,7 @@
   </p:cSld>
   <p:clrMap bg1="lt1" tx1="dk1" bg2="lt2" tx2="dk2" accent1="accent1" accent2="accent2" accent3="accent3" accent4="accent4" accent5="accent5" accent6="accent6" hlink="hlink" folHlink="folHlink"/>
   <p:sldLayoutIdLst>
-    <p:sldLayoutId xmlns:r="http://schemas.openxmlformats.org/officeDocument/2006/relationships" id="2147483649" r:id="R6b240cc9c05a42ed"/>
+    <p:sldLayoutId xmlns:r="http://schemas.openxmlformats.org/officeDocument/2006/relationships" id="2147483649" r:id="R32a73b93f3e54d8a"/>
   </p:sldLayoutIdLst>
   <p:txStyles>
     <p:titleStyle>
@@ -1842,7 +1842,7 @@
           <p:cNvPr id="12" name="">
             <a:extLst xmlns:a="http://schemas.openxmlformats.org/drawingml/2006/main">
               <a:ext uri="{FF2B5EF4-FFF2-40B4-BE49-F238E27FC236}">
-                <a16:creationId xmlns:a16="http://schemas.microsoft.com/office/drawing/2014/main" id="{447BB0B0-E924-4CF6-8514-B8C2DE29490E}"/>
+                <a16:creationId xmlns:a16="http://schemas.microsoft.com/office/drawing/2014/main" id="{072051B8-3A7A-4865-BDF7-150D771B6CE5}"/>
               </a:ext>
             </a:extLst>
           </p:cNvPr>
@@ -1874,7 +1874,7 @@
           <p:cNvPr id="2" name="">
             <a:extLst xmlns:a="http://schemas.openxmlformats.org/drawingml/2006/main">
               <a:ext uri="{FF2B5EF4-FFF2-40B4-BE49-F238E27FC236}">
-                <a16:creationId xmlns:a16="http://schemas.microsoft.com/office/drawing/2014/main" id="{963C78EC-CF65-410F-A8EF-3A9C37312858}"/>
+                <a16:creationId xmlns:a16="http://schemas.microsoft.com/office/drawing/2014/main" id="{A449C63E-BEC6-471E-B8BD-4CBA31E2B7F8}"/>
               </a:ext>
             </a:extLst>
           </p:cNvPr>
@@ -1931,7 +1931,7 @@
           <p:cNvPr id="3" name="">
             <a:extLst xmlns:a="http://schemas.openxmlformats.org/drawingml/2006/main">
               <a:ext uri="{FF2B5EF4-FFF2-40B4-BE49-F238E27FC236}">
-                <a16:creationId xmlns:a16="http://schemas.microsoft.com/office/drawing/2014/main" id="{B91ED811-A574-4C9C-9606-59DF03D16175}"/>
+                <a16:creationId xmlns:a16="http://schemas.microsoft.com/office/drawing/2014/main" id="{D8E189F8-C9A6-4D91-BAA0-80D7E8A1F56C}"/>
               </a:ext>
             </a:extLst>
           </p:cNvPr>
@@ -1965,7 +1965,7 @@
           <p:cNvPr id="4" name="">
             <a:extLst xmlns:a="http://schemas.openxmlformats.org/drawingml/2006/main">
               <a:ext uri="{FF2B5EF4-FFF2-40B4-BE49-F238E27FC236}">
-                <a16:creationId xmlns:a16="http://schemas.microsoft.com/office/drawing/2014/main" id="{E9475FD2-F4BA-46C9-BD8C-6FEDAC15486C}"/>
+                <a16:creationId xmlns:a16="http://schemas.microsoft.com/office/drawing/2014/main" id="{273B790D-DC40-4B22-BD42-10A344BD9A17}"/>
               </a:ext>
             </a:extLst>
           </p:cNvPr>
@@ -2022,7 +2022,7 @@
           <p:cNvPr id="5" name="">
             <a:extLst xmlns:a="http://schemas.openxmlformats.org/drawingml/2006/main">
               <a:ext uri="{FF2B5EF4-FFF2-40B4-BE49-F238E27FC236}">
-                <a16:creationId xmlns:a16="http://schemas.microsoft.com/office/drawing/2014/main" id="{9F5B2FF9-9DA2-415E-9FF8-4E04BF7C41AB}"/>
+                <a16:creationId xmlns:a16="http://schemas.microsoft.com/office/drawing/2014/main" id="{9B22B81D-8686-4B89-97F5-3F4BF86B00C2}"/>
               </a:ext>
             </a:extLst>
           </p:cNvPr>
@@ -2079,7 +2079,7 @@
           <p:cNvPr id="6" name="">
             <a:extLst xmlns:a="http://schemas.openxmlformats.org/drawingml/2006/main">
               <a:ext uri="{FF2B5EF4-FFF2-40B4-BE49-F238E27FC236}">
-                <a16:creationId xmlns:a16="http://schemas.microsoft.com/office/drawing/2014/main" id="{338AAF49-8B41-4AA1-B051-B0E02F2FC73C}"/>
+                <a16:creationId xmlns:a16="http://schemas.microsoft.com/office/drawing/2014/main" id="{CD8B0270-13AC-48CD-B383-E97354611CB8}"/>
               </a:ext>
             </a:extLst>
           </p:cNvPr>
@@ -2113,7 +2113,7 @@
           <p:cNvPr id="7" name="">
             <a:extLst xmlns:a="http://schemas.openxmlformats.org/drawingml/2006/main">
               <a:ext uri="{FF2B5EF4-FFF2-40B4-BE49-F238E27FC236}">
-                <a16:creationId xmlns:a16="http://schemas.microsoft.com/office/drawing/2014/main" id="{BB894389-2F61-4E77-82C8-222FD2CE8810}"/>
+                <a16:creationId xmlns:a16="http://schemas.microsoft.com/office/drawing/2014/main" id="{A464C4D5-CF30-4FEC-83D1-B90AA374EB24}"/>
               </a:ext>
             </a:extLst>
           </p:cNvPr>
@@ -2170,7 +2170,7 @@
           <p:cNvPr id="8" name="">
             <a:extLst xmlns:a="http://schemas.openxmlformats.org/drawingml/2006/main">
               <a:ext uri="{FF2B5EF4-FFF2-40B4-BE49-F238E27FC236}">
-                <a16:creationId xmlns:a16="http://schemas.microsoft.com/office/drawing/2014/main" id="{76A91A81-9DA9-48F7-A74F-C7D71CADA640}"/>
+                <a16:creationId xmlns:a16="http://schemas.microsoft.com/office/drawing/2014/main" id="{CE184841-1FAA-43A9-AB2F-FF5F7327FF58}"/>
               </a:ext>
             </a:extLst>
           </p:cNvPr>
@@ -2227,7 +2227,7 @@
           <p:cNvPr id="9" name="">
             <a:extLst xmlns:a="http://schemas.openxmlformats.org/drawingml/2006/main">
               <a:ext uri="{FF2B5EF4-FFF2-40B4-BE49-F238E27FC236}">
-                <a16:creationId xmlns:a16="http://schemas.microsoft.com/office/drawing/2014/main" id="{153934D3-363B-4885-9FDA-5257A2262B43}"/>
+                <a16:creationId xmlns:a16="http://schemas.microsoft.com/office/drawing/2014/main" id="{FD38E61F-6A7E-4665-86DB-5D528BDF97DA}"/>
               </a:ext>
             </a:extLst>
           </p:cNvPr>
@@ -2284,7 +2284,7 @@
           <p:cNvPr id="10" name="">
             <a:extLst xmlns:a="http://schemas.openxmlformats.org/drawingml/2006/main">
               <a:ext uri="{FF2B5EF4-FFF2-40B4-BE49-F238E27FC236}">
-                <a16:creationId xmlns:a16="http://schemas.microsoft.com/office/drawing/2014/main" id="{FCC7D477-76DF-4E42-83C2-7940B941A618}"/>
+                <a16:creationId xmlns:a16="http://schemas.microsoft.com/office/drawing/2014/main" id="{BEE1E375-85DE-4BDD-B815-BEED1DC63E3A}"/>
               </a:ext>
             </a:extLst>
           </p:cNvPr>
@@ -2341,7 +2341,7 @@
           <p:cNvPr id="11" name="">
             <a:extLst xmlns:a="http://schemas.openxmlformats.org/drawingml/2006/main">
               <a:ext uri="{FF2B5EF4-FFF2-40B4-BE49-F238E27FC236}">
-                <a16:creationId xmlns:a16="http://schemas.microsoft.com/office/drawing/2014/main" id="{87B0D5F2-AE7E-43D5-A43B-435EA990FDB3}"/>
+                <a16:creationId xmlns:a16="http://schemas.microsoft.com/office/drawing/2014/main" id="{8F6F8371-B074-494C-BA6D-9DFAF0F97B18}"/>
               </a:ext>
             </a:extLst>
           </p:cNvPr>
@@ -2396,7 +2396,7 @@
     </p:spTree>
     <p:extLst>
       <p:ext uri="{BB962C8B-B14F-4D97-AF65-F5344CB8AC3E}">
-        <p14:creationId xmlns:p14="http://schemas.microsoft.com/office/powerpoint/2010/main" val="2101103491"/>
+        <p14:creationId xmlns:p14="http://schemas.microsoft.com/office/powerpoint/2010/main" val="1815988918"/>
       </p:ext>
     </p:extLst>
   </p:cSld>
@@ -2427,7 +2427,7 @@
           <p:cNvPr id="14" name="">
             <a:extLst xmlns:a="http://schemas.openxmlformats.org/drawingml/2006/main">
               <a:ext uri="{FF2B5EF4-FFF2-40B4-BE49-F238E27FC236}">
-                <a16:creationId xmlns:a16="http://schemas.microsoft.com/office/drawing/2014/main" id="{027B99F2-38B2-44AA-9B77-4578F9A62BEA}"/>
+                <a16:creationId xmlns:a16="http://schemas.microsoft.com/office/drawing/2014/main" id="{568A0F95-324F-4E27-A6E4-D10323F9FC8A}"/>
               </a:ext>
             </a:extLst>
           </p:cNvPr>
@@ -2459,7 +2459,7 @@
           <p:cNvPr id="2" name="">
             <a:extLst xmlns:a="http://schemas.openxmlformats.org/drawingml/2006/main">
               <a:ext uri="{FF2B5EF4-FFF2-40B4-BE49-F238E27FC236}">
-                <a16:creationId xmlns:a16="http://schemas.microsoft.com/office/drawing/2014/main" id="{4D5F475A-7F85-4C5C-9E85-061F68DEEA9D}"/>
+                <a16:creationId xmlns:a16="http://schemas.microsoft.com/office/drawing/2014/main" id="{3E64BAA1-82F3-4B16-8153-3E3707EC6C19}"/>
               </a:ext>
             </a:extLst>
           </p:cNvPr>
@@ -2516,7 +2516,7 @@
           <p:cNvPr id="3" name="">
             <a:extLst xmlns:a="http://schemas.openxmlformats.org/drawingml/2006/main">
               <a:ext uri="{FF2B5EF4-FFF2-40B4-BE49-F238E27FC236}">
-                <a16:creationId xmlns:a16="http://schemas.microsoft.com/office/drawing/2014/main" id="{436D92BD-169B-4695-BA9C-29A9FE7F58F8}"/>
+                <a16:creationId xmlns:a16="http://schemas.microsoft.com/office/drawing/2014/main" id="{E23AE362-04B2-459D-A005-26648D9217E1}"/>
               </a:ext>
             </a:extLst>
           </p:cNvPr>
@@ -2548,7 +2548,7 @@
           <p:cNvPr id="4" name="">
             <a:extLst xmlns:a="http://schemas.openxmlformats.org/drawingml/2006/main">
               <a:ext uri="{FF2B5EF4-FFF2-40B4-BE49-F238E27FC236}">
-                <a16:creationId xmlns:a16="http://schemas.microsoft.com/office/drawing/2014/main" id="{C26E5A82-85B5-4C93-9F08-9BA36350B0FC}"/>
+                <a16:creationId xmlns:a16="http://schemas.microsoft.com/office/drawing/2014/main" id="{F8F47284-E7C1-47F7-BC19-967CF9D490D5}"/>
               </a:ext>
             </a:extLst>
           </p:cNvPr>
@@ -2605,7 +2605,7 @@
           <p:cNvPr id="5" name="">
             <a:extLst xmlns:a="http://schemas.openxmlformats.org/drawingml/2006/main">
               <a:ext uri="{FF2B5EF4-FFF2-40B4-BE49-F238E27FC236}">
-                <a16:creationId xmlns:a16="http://schemas.microsoft.com/office/drawing/2014/main" id="{4D8BAB6E-A77A-4DE7-8D2C-9328479BD6B8}"/>
+                <a16:creationId xmlns:a16="http://schemas.microsoft.com/office/drawing/2014/main" id="{C365376F-B000-4B06-80E0-BA869F56BC5E}"/>
               </a:ext>
             </a:extLst>
           </p:cNvPr>
@@ -2662,7 +2662,7 @@
           <p:cNvPr id="6" name="">
             <a:extLst xmlns:a="http://schemas.openxmlformats.org/drawingml/2006/main">
               <a:ext uri="{FF2B5EF4-FFF2-40B4-BE49-F238E27FC236}">
-                <a16:creationId xmlns:a16="http://schemas.microsoft.com/office/drawing/2014/main" id="{DE27E948-D4FC-433E-8F99-6939007A1DCC}"/>
+                <a16:creationId xmlns:a16="http://schemas.microsoft.com/office/drawing/2014/main" id="{54B88686-1C4C-4A22-9918-542A88F8CA90}"/>
               </a:ext>
             </a:extLst>
           </p:cNvPr>
@@ -2719,7 +2719,7 @@
           <p:cNvPr id="7" name="">
             <a:extLst xmlns:a="http://schemas.openxmlformats.org/drawingml/2006/main">
               <a:ext uri="{FF2B5EF4-FFF2-40B4-BE49-F238E27FC236}">
-                <a16:creationId xmlns:a16="http://schemas.microsoft.com/office/drawing/2014/main" id="{AB25A7F1-0616-4E85-875D-1FC2FEA82DBE}"/>
+                <a16:creationId xmlns:a16="http://schemas.microsoft.com/office/drawing/2014/main" id="{081AC15D-430A-4032-8778-83F467A5BB22}"/>
               </a:ext>
             </a:extLst>
           </p:cNvPr>
@@ -2751,7 +2751,7 @@
           <p:cNvPr id="8" name="">
             <a:extLst xmlns:a="http://schemas.openxmlformats.org/drawingml/2006/main">
               <a:ext uri="{FF2B5EF4-FFF2-40B4-BE49-F238E27FC236}">
-                <a16:creationId xmlns:a16="http://schemas.microsoft.com/office/drawing/2014/main" id="{70125FFB-491C-4A74-AEA5-70F30699847E}"/>
+                <a16:creationId xmlns:a16="http://schemas.microsoft.com/office/drawing/2014/main" id="{6FF9C735-6977-45F6-AEAB-057AAAC83D2B}"/>
               </a:ext>
             </a:extLst>
           </p:cNvPr>
@@ -2808,7 +2808,7 @@
           <p:cNvPr id="9" name="">
             <a:extLst xmlns:a="http://schemas.openxmlformats.org/drawingml/2006/main">
               <a:ext uri="{FF2B5EF4-FFF2-40B4-BE49-F238E27FC236}">
-                <a16:creationId xmlns:a16="http://schemas.microsoft.com/office/drawing/2014/main" id="{AEF37353-6F57-4C89-B256-1B309F29ABFC}"/>
+                <a16:creationId xmlns:a16="http://schemas.microsoft.com/office/drawing/2014/main" id="{7A98143C-D21E-4079-87A4-9589CDEC7B38}"/>
               </a:ext>
             </a:extLst>
           </p:cNvPr>
@@ -2865,7 +2865,7 @@
           <p:cNvPr id="10" name="">
             <a:extLst xmlns:a="http://schemas.openxmlformats.org/drawingml/2006/main">
               <a:ext uri="{FF2B5EF4-FFF2-40B4-BE49-F238E27FC236}">
-                <a16:creationId xmlns:a16="http://schemas.microsoft.com/office/drawing/2014/main" id="{C1DB1348-727C-4914-96FD-9000E96B1034}"/>
+                <a16:creationId xmlns:a16="http://schemas.microsoft.com/office/drawing/2014/main" id="{CB648C55-9E01-4DDF-BC3E-EA7BC048ED77}"/>
               </a:ext>
             </a:extLst>
           </p:cNvPr>
@@ -2922,7 +2922,7 @@
           <p:cNvPr id="11" name="">
             <a:extLst xmlns:a="http://schemas.openxmlformats.org/drawingml/2006/main">
               <a:ext uri="{FF2B5EF4-FFF2-40B4-BE49-F238E27FC236}">
-                <a16:creationId xmlns:a16="http://schemas.microsoft.com/office/drawing/2014/main" id="{C7B65BFA-1E2A-40D0-A195-D0CA22290887}"/>
+                <a16:creationId xmlns:a16="http://schemas.microsoft.com/office/drawing/2014/main" id="{1338403D-35C4-4C1A-8C37-AEE85E5C4AA4}"/>
               </a:ext>
             </a:extLst>
           </p:cNvPr>
@@ -2979,7 +2979,7 @@
           <p:cNvPr id="12" name="">
             <a:extLst xmlns:a="http://schemas.openxmlformats.org/drawingml/2006/main">
               <a:ext uri="{FF2B5EF4-FFF2-40B4-BE49-F238E27FC236}">
-                <a16:creationId xmlns:a16="http://schemas.microsoft.com/office/drawing/2014/main" id="{301D625F-2A07-4BCC-9EEE-AB36F8091ED5}"/>
+                <a16:creationId xmlns:a16="http://schemas.microsoft.com/office/drawing/2014/main" id="{EF6F2371-6E10-4604-BC47-8B3C78997806}"/>
               </a:ext>
             </a:extLst>
           </p:cNvPr>
@@ -3036,7 +3036,7 @@
           <p:cNvPr id="13" name="">
             <a:extLst xmlns:a="http://schemas.openxmlformats.org/drawingml/2006/main">
               <a:ext uri="{FF2B5EF4-FFF2-40B4-BE49-F238E27FC236}">
-                <a16:creationId xmlns:a16="http://schemas.microsoft.com/office/drawing/2014/main" id="{DA781E9E-3132-4A64-B2C0-DE6F6F73E753}"/>
+                <a16:creationId xmlns:a16="http://schemas.microsoft.com/office/drawing/2014/main" id="{0CF7A38F-2679-4437-BBE8-197695BD4A64}"/>
               </a:ext>
             </a:extLst>
           </p:cNvPr>
@@ -3091,7 +3091,7 @@
     </p:spTree>
     <p:extLst>
       <p:ext uri="{BB962C8B-B14F-4D97-AF65-F5344CB8AC3E}">
-        <p14:creationId xmlns:p14="http://schemas.microsoft.com/office/powerpoint/2010/main" val="2143555870"/>
+        <p14:creationId xmlns:p14="http://schemas.microsoft.com/office/powerpoint/2010/main" val="1056186717"/>
       </p:ext>
     </p:extLst>
   </p:cSld>
@@ -3292,7 +3292,7 @@
           <p:cNvPr id="19" name="">
             <a:extLst xmlns:a="http://schemas.openxmlformats.org/drawingml/2006/main">
               <a:ext uri="{FF2B5EF4-FFF2-40B4-BE49-F238E27FC236}">
-                <a16:creationId xmlns:a16="http://schemas.microsoft.com/office/drawing/2014/main" id="{0DC0471B-DE1C-426E-9939-9D2ED3EA11C4}"/>
+                <a16:creationId xmlns:a16="http://schemas.microsoft.com/office/drawing/2014/main" id="{B45A5643-EC2A-4EF3-86AF-0B1F8013778C}"/>
               </a:ext>
             </a:extLst>
           </p:cNvPr>
@@ -3324,7 +3324,7 @@
           <p:cNvPr id="2" name="">
             <a:extLst xmlns:a="http://schemas.openxmlformats.org/drawingml/2006/main">
               <a:ext uri="{FF2B5EF4-FFF2-40B4-BE49-F238E27FC236}">
-                <a16:creationId xmlns:a16="http://schemas.microsoft.com/office/drawing/2014/main" id="{8BFB7900-C991-44AF-BA1E-8696F4E22C2D}"/>
+                <a16:creationId xmlns:a16="http://schemas.microsoft.com/office/drawing/2014/main" id="{6792A10C-1181-476F-869F-49A83305630D}"/>
               </a:ext>
             </a:extLst>
           </p:cNvPr>
@@ -3381,7 +3381,7 @@
           <p:cNvPr id="3" name="">
             <a:extLst xmlns:a="http://schemas.openxmlformats.org/drawingml/2006/main">
               <a:ext uri="{FF2B5EF4-FFF2-40B4-BE49-F238E27FC236}">
-                <a16:creationId xmlns:a16="http://schemas.microsoft.com/office/drawing/2014/main" id="{BC253E89-B81A-4116-9835-00A82A9C8DB8}"/>
+                <a16:creationId xmlns:a16="http://schemas.microsoft.com/office/drawing/2014/main" id="{F0A2728E-4DCD-4FA9-9B1F-4C162B9DC4B1}"/>
               </a:ext>
             </a:extLst>
           </p:cNvPr>
@@ -3413,7 +3413,7 @@
           <p:cNvPr id="4" name="">
             <a:extLst xmlns:a="http://schemas.openxmlformats.org/drawingml/2006/main">
               <a:ext uri="{FF2B5EF4-FFF2-40B4-BE49-F238E27FC236}">
-                <a16:creationId xmlns:a16="http://schemas.microsoft.com/office/drawing/2014/main" id="{80F8F917-D7A1-4DAA-B31E-E10035C49D0D}"/>
+                <a16:creationId xmlns:a16="http://schemas.microsoft.com/office/drawing/2014/main" id="{B3915EE6-E7E9-475B-976C-F6B032BCD87A}"/>
               </a:ext>
             </a:extLst>
           </p:cNvPr>
@@ -3470,7 +3470,7 @@
           <p:cNvPr id="5" name="">
             <a:extLst xmlns:a="http://schemas.openxmlformats.org/drawingml/2006/main">
               <a:ext uri="{FF2B5EF4-FFF2-40B4-BE49-F238E27FC236}">
-                <a16:creationId xmlns:a16="http://schemas.microsoft.com/office/drawing/2014/main" id="{636711B1-369D-4D27-A0D8-109C85332170}"/>
+                <a16:creationId xmlns:a16="http://schemas.microsoft.com/office/drawing/2014/main" id="{68C12E00-CD1A-47D5-838E-1433CF4C4605}"/>
               </a:ext>
             </a:extLst>
           </p:cNvPr>
@@ -3527,7 +3527,7 @@
           <p:cNvPr id="6" name="">
             <a:extLst xmlns:a="http://schemas.openxmlformats.org/drawingml/2006/main">
               <a:ext uri="{FF2B5EF4-FFF2-40B4-BE49-F238E27FC236}">
-                <a16:creationId xmlns:a16="http://schemas.microsoft.com/office/drawing/2014/main" id="{0A99CCF6-7412-4CE3-B6C0-05D3A2EC32C0}"/>
+                <a16:creationId xmlns:a16="http://schemas.microsoft.com/office/drawing/2014/main" id="{C0DC6D45-EF50-456A-8CA2-F7F0CCE2CCB1}"/>
               </a:ext>
             </a:extLst>
           </p:cNvPr>
@@ -3584,7 +3584,7 @@
           <p:cNvPr id="7" name="">
             <a:extLst xmlns:a="http://schemas.openxmlformats.org/drawingml/2006/main">
               <a:ext uri="{FF2B5EF4-FFF2-40B4-BE49-F238E27FC236}">
-                <a16:creationId xmlns:a16="http://schemas.microsoft.com/office/drawing/2014/main" id="{08092152-CC2B-4CCC-B243-9FC445E997A4}"/>
+                <a16:creationId xmlns:a16="http://schemas.microsoft.com/office/drawing/2014/main" id="{74E6839E-13B6-46C7-9E6E-91EA2BA7ACEC}"/>
               </a:ext>
             </a:extLst>
           </p:cNvPr>
@@ -3616,7 +3616,7 @@
           <p:cNvPr id="8" name="">
             <a:extLst xmlns:a="http://schemas.openxmlformats.org/drawingml/2006/main">
               <a:ext uri="{FF2B5EF4-FFF2-40B4-BE49-F238E27FC236}">
-                <a16:creationId xmlns:a16="http://schemas.microsoft.com/office/drawing/2014/main" id="{033D7455-3300-4DE0-98F1-8A6B20108FC2}"/>
+                <a16:creationId xmlns:a16="http://schemas.microsoft.com/office/drawing/2014/main" id="{29328FD6-6893-4083-8C02-91871C91333E}"/>
               </a:ext>
             </a:extLst>
           </p:cNvPr>
@@ -3673,7 +3673,7 @@
           <p:cNvPr id="9" name="">
             <a:extLst xmlns:a="http://schemas.openxmlformats.org/drawingml/2006/main">
               <a:ext uri="{FF2B5EF4-FFF2-40B4-BE49-F238E27FC236}">
-                <a16:creationId xmlns:a16="http://schemas.microsoft.com/office/drawing/2014/main" id="{C5803A23-0413-476B-9467-EBBDDDB995DC}"/>
+                <a16:creationId xmlns:a16="http://schemas.microsoft.com/office/drawing/2014/main" id="{C9582CC9-F5DF-426E-9070-2787B863E93D}"/>
               </a:ext>
             </a:extLst>
           </p:cNvPr>
@@ -3730,7 +3730,7 @@
           <p:cNvPr id="10" name="">
             <a:extLst xmlns:a="http://schemas.openxmlformats.org/drawingml/2006/main">
               <a:ext uri="{FF2B5EF4-FFF2-40B4-BE49-F238E27FC236}">
-                <a16:creationId xmlns:a16="http://schemas.microsoft.com/office/drawing/2014/main" id="{70D53434-25E9-4EF4-8EE4-C2E773ED5D6B}"/>
+                <a16:creationId xmlns:a16="http://schemas.microsoft.com/office/drawing/2014/main" id="{F5CB9CB8-9217-488E-B702-89942C491846}"/>
               </a:ext>
             </a:extLst>
           </p:cNvPr>
@@ -3787,7 +3787,7 @@
           <p:cNvPr id="11" name="">
             <a:extLst xmlns:a="http://schemas.openxmlformats.org/drawingml/2006/main">
               <a:ext uri="{FF2B5EF4-FFF2-40B4-BE49-F238E27FC236}">
-                <a16:creationId xmlns:a16="http://schemas.microsoft.com/office/drawing/2014/main" id="{999C3B54-DDC6-42E3-9604-3F5043DE5F6D}"/>
+                <a16:creationId xmlns:a16="http://schemas.microsoft.com/office/drawing/2014/main" id="{90619B88-B546-461C-83C0-E23E5964CE5B}"/>
               </a:ext>
             </a:extLst>
           </p:cNvPr>
@@ -3821,7 +3821,7 @@
           <p:cNvPr id="12" name="">
             <a:extLst xmlns:a="http://schemas.openxmlformats.org/drawingml/2006/main">
               <a:ext uri="{FF2B5EF4-FFF2-40B4-BE49-F238E27FC236}">
-                <a16:creationId xmlns:a16="http://schemas.microsoft.com/office/drawing/2014/main" id="{B7526DDF-7FF2-49F6-B348-3C615C44E11F}"/>
+                <a16:creationId xmlns:a16="http://schemas.microsoft.com/office/drawing/2014/main" id="{A57143F6-6530-48F2-A99A-69877796620B}"/>
               </a:ext>
             </a:extLst>
           </p:cNvPr>
@@ -3878,7 +3878,7 @@
           <p:cNvPr id="13" name="">
             <a:extLst xmlns:a="http://schemas.openxmlformats.org/drawingml/2006/main">
               <a:ext uri="{FF2B5EF4-FFF2-40B4-BE49-F238E27FC236}">
-                <a16:creationId xmlns:a16="http://schemas.microsoft.com/office/drawing/2014/main" id="{F8100CDC-BAA6-4F1D-A08C-72E254E15F43}"/>
+                <a16:creationId xmlns:a16="http://schemas.microsoft.com/office/drawing/2014/main" id="{9F769D02-9022-4F8A-B1C9-A3AC9F9F57CF}"/>
               </a:ext>
             </a:extLst>
           </p:cNvPr>
@@ -3935,7 +3935,7 @@
           <p:cNvPr id="14" name="">
             <a:extLst xmlns:a="http://schemas.openxmlformats.org/drawingml/2006/main">
               <a:ext uri="{FF2B5EF4-FFF2-40B4-BE49-F238E27FC236}">
-                <a16:creationId xmlns:a16="http://schemas.microsoft.com/office/drawing/2014/main" id="{C7407A22-1B78-4F2C-AF7A-4037AA71EC42}"/>
+                <a16:creationId xmlns:a16="http://schemas.microsoft.com/office/drawing/2014/main" id="{4430510E-0C6E-4569-8650-60D58D84A399}"/>
               </a:ext>
             </a:extLst>
           </p:cNvPr>
@@ -3992,7 +3992,7 @@
           <p:cNvPr id="15" name="">
             <a:extLst xmlns:a="http://schemas.openxmlformats.org/drawingml/2006/main">
               <a:ext uri="{FF2B5EF4-FFF2-40B4-BE49-F238E27FC236}">
-                <a16:creationId xmlns:a16="http://schemas.microsoft.com/office/drawing/2014/main" id="{E205FB71-4835-44D3-BBCA-D3506053CD78}"/>
+                <a16:creationId xmlns:a16="http://schemas.microsoft.com/office/drawing/2014/main" id="{04800F5C-8DF1-41C0-8BFD-3B6FA90672B3}"/>
               </a:ext>
             </a:extLst>
           </p:cNvPr>
@@ -4026,7 +4026,7 @@
           <p:cNvPr id="16" name="">
             <a:extLst xmlns:a="http://schemas.openxmlformats.org/drawingml/2006/main">
               <a:ext uri="{FF2B5EF4-FFF2-40B4-BE49-F238E27FC236}">
-                <a16:creationId xmlns:a16="http://schemas.microsoft.com/office/drawing/2014/main" id="{B8EA8EBF-9FBE-463B-907D-DE6E8530C3FC}"/>
+                <a16:creationId xmlns:a16="http://schemas.microsoft.com/office/drawing/2014/main" id="{6EB63E5C-7844-4826-B366-69E633DA7805}"/>
               </a:ext>
             </a:extLst>
           </p:cNvPr>
@@ -4083,7 +4083,7 @@
           <p:cNvPr id="17" name="">
             <a:extLst xmlns:a="http://schemas.openxmlformats.org/drawingml/2006/main">
               <a:ext uri="{FF2B5EF4-FFF2-40B4-BE49-F238E27FC236}">
-                <a16:creationId xmlns:a16="http://schemas.microsoft.com/office/drawing/2014/main" id="{93282D04-117F-41E9-A2A7-C46A3E3E6BB7}"/>
+                <a16:creationId xmlns:a16="http://schemas.microsoft.com/office/drawing/2014/main" id="{5858A93A-CF76-4D33-B4A0-393E151A9826}"/>
               </a:ext>
             </a:extLst>
           </p:cNvPr>
@@ -4140,7 +4140,7 @@
           <p:cNvPr id="18" name="">
             <a:extLst xmlns:a="http://schemas.openxmlformats.org/drawingml/2006/main">
               <a:ext uri="{FF2B5EF4-FFF2-40B4-BE49-F238E27FC236}">
-                <a16:creationId xmlns:a16="http://schemas.microsoft.com/office/drawing/2014/main" id="{7D0EB48D-2EF2-4A2D-BC06-43B9397FC1DE}"/>
+                <a16:creationId xmlns:a16="http://schemas.microsoft.com/office/drawing/2014/main" id="{B2EF6164-B3EF-44B5-9CFA-60F44D777A8F}"/>
               </a:ext>
             </a:extLst>
           </p:cNvPr>
@@ -4195,7 +4195,7 @@
     </p:spTree>
     <p:extLst>
       <p:ext uri="{BB962C8B-B14F-4D97-AF65-F5344CB8AC3E}">
-        <p14:creationId xmlns:p14="http://schemas.microsoft.com/office/powerpoint/2010/main" val="602160481"/>
+        <p14:creationId xmlns:p14="http://schemas.microsoft.com/office/powerpoint/2010/main" val="1881911101"/>
       </p:ext>
     </p:extLst>
   </p:cSld>
@@ -4350,7 +4350,7 @@
           <p:cNvPr id="23" name="">
             <a:extLst xmlns:a="http://schemas.openxmlformats.org/drawingml/2006/main">
               <a:ext uri="{FF2B5EF4-FFF2-40B4-BE49-F238E27FC236}">
-                <a16:creationId xmlns:a16="http://schemas.microsoft.com/office/drawing/2014/main" id="{ECFAE19E-06F6-4542-8F06-D39A645D261B}"/>
+                <a16:creationId xmlns:a16="http://schemas.microsoft.com/office/drawing/2014/main" id="{1BF3EAF7-C49E-43C1-B5A0-C6317381AD41}"/>
               </a:ext>
             </a:extLst>
           </p:cNvPr>
@@ -4382,7 +4382,7 @@
           <p:cNvPr id="2" name="">
             <a:extLst xmlns:a="http://schemas.openxmlformats.org/drawingml/2006/main">
               <a:ext uri="{FF2B5EF4-FFF2-40B4-BE49-F238E27FC236}">
-                <a16:creationId xmlns:a16="http://schemas.microsoft.com/office/drawing/2014/main" id="{AC620E32-AB5A-4FB9-8FC5-75FBC30A3244}"/>
+                <a16:creationId xmlns:a16="http://schemas.microsoft.com/office/drawing/2014/main" id="{C0FFD615-DD4C-4E0B-9493-D2F018D5F0E7}"/>
               </a:ext>
             </a:extLst>
           </p:cNvPr>
@@ -4439,7 +4439,7 @@
           <p:cNvPr id="3" name="">
             <a:extLst xmlns:a="http://schemas.openxmlformats.org/drawingml/2006/main">
               <a:ext uri="{FF2B5EF4-FFF2-40B4-BE49-F238E27FC236}">
-                <a16:creationId xmlns:a16="http://schemas.microsoft.com/office/drawing/2014/main" id="{6D2A3330-B722-4015-85EE-3D25E2EEE556}"/>
+                <a16:creationId xmlns:a16="http://schemas.microsoft.com/office/drawing/2014/main" id="{58DBF3CD-F0AB-41D2-A5A5-1CA1E3909E06}"/>
               </a:ext>
             </a:extLst>
           </p:cNvPr>
@@ -4471,7 +4471,7 @@
           <p:cNvPr id="4" name="">
             <a:extLst xmlns:a="http://schemas.openxmlformats.org/drawingml/2006/main">
               <a:ext uri="{FF2B5EF4-FFF2-40B4-BE49-F238E27FC236}">
-                <a16:creationId xmlns:a16="http://schemas.microsoft.com/office/drawing/2014/main" id="{EC96F4A8-B015-4116-8CDF-15FC8D457305}"/>
+                <a16:creationId xmlns:a16="http://schemas.microsoft.com/office/drawing/2014/main" id="{2B96176A-F96A-4DC6-86A6-D9C480BFEEEB}"/>
               </a:ext>
             </a:extLst>
           </p:cNvPr>
@@ -4528,7 +4528,7 @@
           <p:cNvPr id="5" name="">
             <a:extLst xmlns:a="http://schemas.openxmlformats.org/drawingml/2006/main">
               <a:ext uri="{FF2B5EF4-FFF2-40B4-BE49-F238E27FC236}">
-                <a16:creationId xmlns:a16="http://schemas.microsoft.com/office/drawing/2014/main" id="{B3F9D6D3-AB28-4C65-8E3F-2F410B374DB5}"/>
+                <a16:creationId xmlns:a16="http://schemas.microsoft.com/office/drawing/2014/main" id="{C2A35129-213E-4B64-8BE8-F4F13CEC0341}"/>
               </a:ext>
             </a:extLst>
           </p:cNvPr>
@@ -4585,7 +4585,7 @@
           <p:cNvPr id="6" name="">
             <a:extLst xmlns:a="http://schemas.openxmlformats.org/drawingml/2006/main">
               <a:ext uri="{FF2B5EF4-FFF2-40B4-BE49-F238E27FC236}">
-                <a16:creationId xmlns:a16="http://schemas.microsoft.com/office/drawing/2014/main" id="{9B61E3D0-D142-4C5E-8726-2DD09E010C4A}"/>
+                <a16:creationId xmlns:a16="http://schemas.microsoft.com/office/drawing/2014/main" id="{EB70D415-5DF4-4FFB-89AC-1AA2C9A5E0F6}"/>
               </a:ext>
             </a:extLst>
           </p:cNvPr>
@@ -4642,7 +4642,7 @@
           <p:cNvPr id="7" name="">
             <a:extLst xmlns:a="http://schemas.openxmlformats.org/drawingml/2006/main">
               <a:ext uri="{FF2B5EF4-FFF2-40B4-BE49-F238E27FC236}">
-                <a16:creationId xmlns:a16="http://schemas.microsoft.com/office/drawing/2014/main" id="{86A36CD5-945C-492D-B0E6-18737C376FFB}"/>
+                <a16:creationId xmlns:a16="http://schemas.microsoft.com/office/drawing/2014/main" id="{C4237EDE-5002-4A07-B146-FA423E8DEAE4}"/>
               </a:ext>
             </a:extLst>
           </p:cNvPr>
@@ -4674,7 +4674,7 @@
           <p:cNvPr id="8" name="">
             <a:extLst xmlns:a="http://schemas.openxmlformats.org/drawingml/2006/main">
               <a:ext uri="{FF2B5EF4-FFF2-40B4-BE49-F238E27FC236}">
-                <a16:creationId xmlns:a16="http://schemas.microsoft.com/office/drawing/2014/main" id="{2499C1DC-5BD1-4C52-AF2D-7C1E830CDFE4}"/>
+                <a16:creationId xmlns:a16="http://schemas.microsoft.com/office/drawing/2014/main" id="{F94BB032-2582-422A-872E-6E04EDFC79D2}"/>
               </a:ext>
             </a:extLst>
           </p:cNvPr>
@@ -4731,7 +4731,7 @@
           <p:cNvPr id="9" name="">
             <a:extLst xmlns:a="http://schemas.openxmlformats.org/drawingml/2006/main">
               <a:ext uri="{FF2B5EF4-FFF2-40B4-BE49-F238E27FC236}">
-                <a16:creationId xmlns:a16="http://schemas.microsoft.com/office/drawing/2014/main" id="{59A69E80-D460-404C-AA20-BE841BB00908}"/>
+                <a16:creationId xmlns:a16="http://schemas.microsoft.com/office/drawing/2014/main" id="{987292A7-1E07-469C-8A8D-21C5A41C880E}"/>
               </a:ext>
             </a:extLst>
           </p:cNvPr>
@@ -4788,7 +4788,7 @@
           <p:cNvPr id="10" name="">
             <a:extLst xmlns:a="http://schemas.openxmlformats.org/drawingml/2006/main">
               <a:ext uri="{FF2B5EF4-FFF2-40B4-BE49-F238E27FC236}">
-                <a16:creationId xmlns:a16="http://schemas.microsoft.com/office/drawing/2014/main" id="{89B0B401-54D5-44FB-B1F6-4EAFD4E69A75}"/>
+                <a16:creationId xmlns:a16="http://schemas.microsoft.com/office/drawing/2014/main" id="{20AC73D1-F55B-4368-BDAC-D16320BAEE91}"/>
               </a:ext>
             </a:extLst>
           </p:cNvPr>
@@ -4822,7 +4822,7 @@
           <p:cNvPr id="11" name="">
             <a:extLst xmlns:a="http://schemas.openxmlformats.org/drawingml/2006/main">
               <a:ext uri="{FF2B5EF4-FFF2-40B4-BE49-F238E27FC236}">
-                <a16:creationId xmlns:a16="http://schemas.microsoft.com/office/drawing/2014/main" id="{C2447BD1-91A6-4DF8-8E63-F19B4D12ECA8}"/>
+                <a16:creationId xmlns:a16="http://schemas.microsoft.com/office/drawing/2014/main" id="{CBE9D22D-82C3-4064-97E3-65457BDA0383}"/>
               </a:ext>
             </a:extLst>
           </p:cNvPr>
@@ -4854,7 +4854,7 @@
           <p:cNvPr id="12" name="">
             <a:extLst xmlns:a="http://schemas.openxmlformats.org/drawingml/2006/main">
               <a:ext uri="{FF2B5EF4-FFF2-40B4-BE49-F238E27FC236}">
-                <a16:creationId xmlns:a16="http://schemas.microsoft.com/office/drawing/2014/main" id="{EE303CBA-7DAA-4663-92FF-B36294362DBC}"/>
+                <a16:creationId xmlns:a16="http://schemas.microsoft.com/office/drawing/2014/main" id="{29BA9D7A-4779-4F6E-99E0-9645FF4309AB}"/>
               </a:ext>
             </a:extLst>
           </p:cNvPr>
@@ -4911,7 +4911,7 @@
           <p:cNvPr id="13" name="">
             <a:extLst xmlns:a="http://schemas.openxmlformats.org/drawingml/2006/main">
               <a:ext uri="{FF2B5EF4-FFF2-40B4-BE49-F238E27FC236}">
-                <a16:creationId xmlns:a16="http://schemas.microsoft.com/office/drawing/2014/main" id="{57CF7CE4-7E76-45EA-A39A-C67D8BD3F197}"/>
+                <a16:creationId xmlns:a16="http://schemas.microsoft.com/office/drawing/2014/main" id="{0DC65052-426B-424C-ABB1-47975169DB90}"/>
               </a:ext>
             </a:extLst>
           </p:cNvPr>
@@ -4968,7 +4968,7 @@
           <p:cNvPr id="14" name="">
             <a:extLst xmlns:a="http://schemas.openxmlformats.org/drawingml/2006/main">
               <a:ext uri="{FF2B5EF4-FFF2-40B4-BE49-F238E27FC236}">
-                <a16:creationId xmlns:a16="http://schemas.microsoft.com/office/drawing/2014/main" id="{0171BBAC-2139-439E-A1CC-3072F0B1110C}"/>
+                <a16:creationId xmlns:a16="http://schemas.microsoft.com/office/drawing/2014/main" id="{F2C7669B-F49B-4367-84F5-F8D9701C128A}"/>
               </a:ext>
             </a:extLst>
           </p:cNvPr>
@@ -5002,7 +5002,7 @@
           <p:cNvPr id="15" name="">
             <a:extLst xmlns:a="http://schemas.openxmlformats.org/drawingml/2006/main">
               <a:ext uri="{FF2B5EF4-FFF2-40B4-BE49-F238E27FC236}">
-                <a16:creationId xmlns:a16="http://schemas.microsoft.com/office/drawing/2014/main" id="{3139FDBE-0266-4C94-95C5-841A0FF7B796}"/>
+                <a16:creationId xmlns:a16="http://schemas.microsoft.com/office/drawing/2014/main" id="{CF14A02F-B327-4EAC-B9BC-8CE7FD291B27}"/>
               </a:ext>
             </a:extLst>
           </p:cNvPr>
@@ -5034,7 +5034,7 @@
           <p:cNvPr id="16" name="">
             <a:extLst xmlns:a="http://schemas.openxmlformats.org/drawingml/2006/main">
               <a:ext uri="{FF2B5EF4-FFF2-40B4-BE49-F238E27FC236}">
-                <a16:creationId xmlns:a16="http://schemas.microsoft.com/office/drawing/2014/main" id="{F3742ED7-6476-47B5-9743-7009EE0F59BF}"/>
+                <a16:creationId xmlns:a16="http://schemas.microsoft.com/office/drawing/2014/main" id="{57D21E60-07C5-4F4C-BEC6-F25431304EFC}"/>
               </a:ext>
             </a:extLst>
           </p:cNvPr>
@@ -5091,7 +5091,7 @@
           <p:cNvPr id="17" name="">
             <a:extLst xmlns:a="http://schemas.openxmlformats.org/drawingml/2006/main">
               <a:ext uri="{FF2B5EF4-FFF2-40B4-BE49-F238E27FC236}">
-                <a16:creationId xmlns:a16="http://schemas.microsoft.com/office/drawing/2014/main" id="{89CC0FFF-7574-4F5F-B9DE-6D2DE5029DE9}"/>
+                <a16:creationId xmlns:a16="http://schemas.microsoft.com/office/drawing/2014/main" id="{44F262F3-73A3-48E1-ADFB-0F04AF5DDA82}"/>
               </a:ext>
             </a:extLst>
           </p:cNvPr>
@@ -5148,7 +5148,7 @@
           <p:cNvPr id="18" name="">
             <a:extLst xmlns:a="http://schemas.openxmlformats.org/drawingml/2006/main">
               <a:ext uri="{FF2B5EF4-FFF2-40B4-BE49-F238E27FC236}">
-                <a16:creationId xmlns:a16="http://schemas.microsoft.com/office/drawing/2014/main" id="{3BE03F2A-12F5-469F-8763-E87B501B8DCC}"/>
+                <a16:creationId xmlns:a16="http://schemas.microsoft.com/office/drawing/2014/main" id="{9470A624-818E-4BD1-BC63-BD13148511C7}"/>
               </a:ext>
             </a:extLst>
           </p:cNvPr>
@@ -5182,7 +5182,7 @@
           <p:cNvPr id="19" name="">
             <a:extLst xmlns:a="http://schemas.openxmlformats.org/drawingml/2006/main">
               <a:ext uri="{FF2B5EF4-FFF2-40B4-BE49-F238E27FC236}">
-                <a16:creationId xmlns:a16="http://schemas.microsoft.com/office/drawing/2014/main" id="{01419813-0C57-43E5-8179-13FB83E55D3A}"/>
+                <a16:creationId xmlns:a16="http://schemas.microsoft.com/office/drawing/2014/main" id="{BD7065E3-997C-4C3E-8C4F-C2251376A4B9}"/>
               </a:ext>
             </a:extLst>
           </p:cNvPr>
@@ -5214,7 +5214,7 @@
           <p:cNvPr id="20" name="">
             <a:extLst xmlns:a="http://schemas.openxmlformats.org/drawingml/2006/main">
               <a:ext uri="{FF2B5EF4-FFF2-40B4-BE49-F238E27FC236}">
-                <a16:creationId xmlns:a16="http://schemas.microsoft.com/office/drawing/2014/main" id="{48DED22A-53F2-4894-964C-685DF0B7C07B}"/>
+                <a16:creationId xmlns:a16="http://schemas.microsoft.com/office/drawing/2014/main" id="{5E75433D-FB77-436D-B72E-BF56B66F5293}"/>
               </a:ext>
             </a:extLst>
           </p:cNvPr>
@@ -5271,7 +5271,7 @@
           <p:cNvPr id="21" name="">
             <a:extLst xmlns:a="http://schemas.openxmlformats.org/drawingml/2006/main">
               <a:ext uri="{FF2B5EF4-FFF2-40B4-BE49-F238E27FC236}">
-                <a16:creationId xmlns:a16="http://schemas.microsoft.com/office/drawing/2014/main" id="{A67AE581-EE5A-48B6-BE79-79EC66CA68F8}"/>
+                <a16:creationId xmlns:a16="http://schemas.microsoft.com/office/drawing/2014/main" id="{083D8967-3EBD-463A-B17E-A2FD540DC6E9}"/>
               </a:ext>
             </a:extLst>
           </p:cNvPr>
@@ -5328,7 +5328,7 @@
           <p:cNvPr id="22" name="">
             <a:extLst xmlns:a="http://schemas.openxmlformats.org/drawingml/2006/main">
               <a:ext uri="{FF2B5EF4-FFF2-40B4-BE49-F238E27FC236}">
-                <a16:creationId xmlns:a16="http://schemas.microsoft.com/office/drawing/2014/main" id="{4E17E413-7F97-4159-A181-3959367D5797}"/>
+                <a16:creationId xmlns:a16="http://schemas.microsoft.com/office/drawing/2014/main" id="{4A4FB7AB-58C2-4314-9EB9-71D0E8AEE0ED}"/>
               </a:ext>
             </a:extLst>
           </p:cNvPr>
@@ -5383,7 +5383,7 @@
     </p:spTree>
     <p:extLst>
       <p:ext uri="{BB962C8B-B14F-4D97-AF65-F5344CB8AC3E}">
-        <p14:creationId xmlns:p14="http://schemas.microsoft.com/office/powerpoint/2010/main" val="482845825"/>
+        <p14:creationId xmlns:p14="http://schemas.microsoft.com/office/powerpoint/2010/main" val="89670039"/>
       </p:ext>
     </p:extLst>
   </p:cSld>
@@ -5584,7 +5584,7 @@
           <p:cNvPr id="23" name="">
             <a:extLst xmlns:a="http://schemas.openxmlformats.org/drawingml/2006/main">
               <a:ext uri="{FF2B5EF4-FFF2-40B4-BE49-F238E27FC236}">
-                <a16:creationId xmlns:a16="http://schemas.microsoft.com/office/drawing/2014/main" id="{23B5CCA1-33A7-4507-84C9-9DD55B42A342}"/>
+                <a16:creationId xmlns:a16="http://schemas.microsoft.com/office/drawing/2014/main" id="{921C112D-E008-4B1A-86E0-06088157F6E7}"/>
               </a:ext>
             </a:extLst>
           </p:cNvPr>
@@ -5616,7 +5616,7 @@
           <p:cNvPr id="2" name="">
             <a:extLst xmlns:a="http://schemas.openxmlformats.org/drawingml/2006/main">
               <a:ext uri="{FF2B5EF4-FFF2-40B4-BE49-F238E27FC236}">
-                <a16:creationId xmlns:a16="http://schemas.microsoft.com/office/drawing/2014/main" id="{0BE65B9C-331F-4C59-B90F-E9DC8CD131AA}"/>
+                <a16:creationId xmlns:a16="http://schemas.microsoft.com/office/drawing/2014/main" id="{ACC16950-311B-452F-9F51-B60A86CD610F}"/>
               </a:ext>
             </a:extLst>
           </p:cNvPr>
@@ -5673,7 +5673,7 @@
           <p:cNvPr id="3" name="">
             <a:extLst xmlns:a="http://schemas.openxmlformats.org/drawingml/2006/main">
               <a:ext uri="{FF2B5EF4-FFF2-40B4-BE49-F238E27FC236}">
-                <a16:creationId xmlns:a16="http://schemas.microsoft.com/office/drawing/2014/main" id="{480C7BD3-7215-4597-8E35-4E0F0BE51BE6}"/>
+                <a16:creationId xmlns:a16="http://schemas.microsoft.com/office/drawing/2014/main" id="{2A8AA4FC-1D6A-4C0A-AFB8-565F58394B99}"/>
               </a:ext>
             </a:extLst>
           </p:cNvPr>
@@ -5705,7 +5705,7 @@
           <p:cNvPr id="4" name="">
             <a:extLst xmlns:a="http://schemas.openxmlformats.org/drawingml/2006/main">
               <a:ext uri="{FF2B5EF4-FFF2-40B4-BE49-F238E27FC236}">
-                <a16:creationId xmlns:a16="http://schemas.microsoft.com/office/drawing/2014/main" id="{6F62B1AE-DBE7-404F-B99F-D177E41463D1}"/>
+                <a16:creationId xmlns:a16="http://schemas.microsoft.com/office/drawing/2014/main" id="{CBB7367D-5EC2-44DB-9F18-FF111C0963DB}"/>
               </a:ext>
             </a:extLst>
           </p:cNvPr>
@@ -5762,7 +5762,7 @@
           <p:cNvPr id="5" name="">
             <a:extLst xmlns:a="http://schemas.openxmlformats.org/drawingml/2006/main">
               <a:ext uri="{FF2B5EF4-FFF2-40B4-BE49-F238E27FC236}">
-                <a16:creationId xmlns:a16="http://schemas.microsoft.com/office/drawing/2014/main" id="{730038EB-BD1B-448E-9242-B66A3DEECADF}"/>
+                <a16:creationId xmlns:a16="http://schemas.microsoft.com/office/drawing/2014/main" id="{E75255D3-F482-4509-9138-74C24EF11AC2}"/>
               </a:ext>
             </a:extLst>
           </p:cNvPr>
@@ -5819,7 +5819,7 @@
           <p:cNvPr id="6" name="">
             <a:extLst xmlns:a="http://schemas.openxmlformats.org/drawingml/2006/main">
               <a:ext uri="{FF2B5EF4-FFF2-40B4-BE49-F238E27FC236}">
-                <a16:creationId xmlns:a16="http://schemas.microsoft.com/office/drawing/2014/main" id="{CB404F71-26F8-48AD-9833-60DA52A9406E}"/>
+                <a16:creationId xmlns:a16="http://schemas.microsoft.com/office/drawing/2014/main" id="{3DF20D0D-AFDB-499E-BC6F-5B6AAB374E66}"/>
               </a:ext>
             </a:extLst>
           </p:cNvPr>
@@ -5876,7 +5876,7 @@
           <p:cNvPr id="7" name="">
             <a:extLst xmlns:a="http://schemas.openxmlformats.org/drawingml/2006/main">
               <a:ext uri="{FF2B5EF4-FFF2-40B4-BE49-F238E27FC236}">
-                <a16:creationId xmlns:a16="http://schemas.microsoft.com/office/drawing/2014/main" id="{9A47D61D-78EA-489B-85AA-EAE1CB402873}"/>
+                <a16:creationId xmlns:a16="http://schemas.microsoft.com/office/drawing/2014/main" id="{569D33DA-C516-4163-9F63-8766FC2D973C}"/>
               </a:ext>
             </a:extLst>
           </p:cNvPr>
@@ -5908,7 +5908,7 @@
           <p:cNvPr id="8" name="">
             <a:extLst xmlns:a="http://schemas.openxmlformats.org/drawingml/2006/main">
               <a:ext uri="{FF2B5EF4-FFF2-40B4-BE49-F238E27FC236}">
-                <a16:creationId xmlns:a16="http://schemas.microsoft.com/office/drawing/2014/main" id="{5C61F4A6-13DD-4E2B-BB03-2ED959893666}"/>
+                <a16:creationId xmlns:a16="http://schemas.microsoft.com/office/drawing/2014/main" id="{AD961065-6701-441B-BC56-DC528F1A9D24}"/>
               </a:ext>
             </a:extLst>
           </p:cNvPr>
@@ -5965,7 +5965,7 @@
           <p:cNvPr id="9" name="">
             <a:extLst xmlns:a="http://schemas.openxmlformats.org/drawingml/2006/main">
               <a:ext uri="{FF2B5EF4-FFF2-40B4-BE49-F238E27FC236}">
-                <a16:creationId xmlns:a16="http://schemas.microsoft.com/office/drawing/2014/main" id="{42DB7812-1006-4427-A9E8-80A835AB94B5}"/>
+                <a16:creationId xmlns:a16="http://schemas.microsoft.com/office/drawing/2014/main" id="{186B451B-17DE-46C6-BD9B-518378BB5E97}"/>
               </a:ext>
             </a:extLst>
           </p:cNvPr>
@@ -6022,7 +6022,7 @@
           <p:cNvPr id="10" name="">
             <a:extLst xmlns:a="http://schemas.openxmlformats.org/drawingml/2006/main">
               <a:ext uri="{FF2B5EF4-FFF2-40B4-BE49-F238E27FC236}">
-                <a16:creationId xmlns:a16="http://schemas.microsoft.com/office/drawing/2014/main" id="{DFA30E31-C0C2-49C7-86C4-0997AEF95EB4}"/>
+                <a16:creationId xmlns:a16="http://schemas.microsoft.com/office/drawing/2014/main" id="{E2FD6E2F-5021-4D1E-B4DB-05D1B2D7BD53}"/>
               </a:ext>
             </a:extLst>
           </p:cNvPr>
@@ -6056,7 +6056,7 @@
           <p:cNvPr id="11" name="">
             <a:extLst xmlns:a="http://schemas.openxmlformats.org/drawingml/2006/main">
               <a:ext uri="{FF2B5EF4-FFF2-40B4-BE49-F238E27FC236}">
-                <a16:creationId xmlns:a16="http://schemas.microsoft.com/office/drawing/2014/main" id="{1880A0A1-41B0-476B-933D-B552CD1D39B1}"/>
+                <a16:creationId xmlns:a16="http://schemas.microsoft.com/office/drawing/2014/main" id="{B5FB6D65-58E3-4459-8288-7EDE127C1843}"/>
               </a:ext>
             </a:extLst>
           </p:cNvPr>
@@ -6088,7 +6088,7 @@
           <p:cNvPr id="12" name="">
             <a:extLst xmlns:a="http://schemas.openxmlformats.org/drawingml/2006/main">
               <a:ext uri="{FF2B5EF4-FFF2-40B4-BE49-F238E27FC236}">
-                <a16:creationId xmlns:a16="http://schemas.microsoft.com/office/drawing/2014/main" id="{407BB56A-7A8D-4438-A582-B15DE31B1A0F}"/>
+                <a16:creationId xmlns:a16="http://schemas.microsoft.com/office/drawing/2014/main" id="{DC9502CE-E6D3-4767-B4F2-484514C31DBA}"/>
               </a:ext>
             </a:extLst>
           </p:cNvPr>
@@ -6145,7 +6145,7 @@
           <p:cNvPr id="13" name="">
             <a:extLst xmlns:a="http://schemas.openxmlformats.org/drawingml/2006/main">
               <a:ext uri="{FF2B5EF4-FFF2-40B4-BE49-F238E27FC236}">
-                <a16:creationId xmlns:a16="http://schemas.microsoft.com/office/drawing/2014/main" id="{06896121-9645-4FE2-9A05-88628ABACBCC}"/>
+                <a16:creationId xmlns:a16="http://schemas.microsoft.com/office/drawing/2014/main" id="{CCBAD253-7385-470A-8B44-F1F153390803}"/>
               </a:ext>
             </a:extLst>
           </p:cNvPr>
@@ -6202,7 +6202,7 @@
           <p:cNvPr id="14" name="">
             <a:extLst xmlns:a="http://schemas.openxmlformats.org/drawingml/2006/main">
               <a:ext uri="{FF2B5EF4-FFF2-40B4-BE49-F238E27FC236}">
-                <a16:creationId xmlns:a16="http://schemas.microsoft.com/office/drawing/2014/main" id="{E8680FCF-E45F-4C7E-BE1A-298A6885BC64}"/>
+                <a16:creationId xmlns:a16="http://schemas.microsoft.com/office/drawing/2014/main" id="{0C7E1B0A-3889-408C-BDE1-CA6DB31FD70D}"/>
               </a:ext>
             </a:extLst>
           </p:cNvPr>
@@ -6236,7 +6236,7 @@
           <p:cNvPr id="15" name="">
             <a:extLst xmlns:a="http://schemas.openxmlformats.org/drawingml/2006/main">
               <a:ext uri="{FF2B5EF4-FFF2-40B4-BE49-F238E27FC236}">
-                <a16:creationId xmlns:a16="http://schemas.microsoft.com/office/drawing/2014/main" id="{0FC5C9A3-C247-4DFC-8FBD-1B59D3091E37}"/>
+                <a16:creationId xmlns:a16="http://schemas.microsoft.com/office/drawing/2014/main" id="{50427B59-ABD4-41F5-8089-1455A5B67A29}"/>
               </a:ext>
             </a:extLst>
           </p:cNvPr>
@@ -6268,7 +6268,7 @@
           <p:cNvPr id="16" name="">
             <a:extLst xmlns:a="http://schemas.openxmlformats.org/drawingml/2006/main">
               <a:ext uri="{FF2B5EF4-FFF2-40B4-BE49-F238E27FC236}">
-                <a16:creationId xmlns:a16="http://schemas.microsoft.com/office/drawing/2014/main" id="{21635831-8A1F-43D3-B500-1BDDCAB0DF06}"/>
+                <a16:creationId xmlns:a16="http://schemas.microsoft.com/office/drawing/2014/main" id="{F02005A6-2707-48C3-B3F6-4C95CFC47006}"/>
               </a:ext>
             </a:extLst>
           </p:cNvPr>
@@ -6325,7 +6325,7 @@
           <p:cNvPr id="17" name="">
             <a:extLst xmlns:a="http://schemas.openxmlformats.org/drawingml/2006/main">
               <a:ext uri="{FF2B5EF4-FFF2-40B4-BE49-F238E27FC236}">
-                <a16:creationId xmlns:a16="http://schemas.microsoft.com/office/drawing/2014/main" id="{586056F3-1131-441A-A5C0-44CE8E17E0AA}"/>
+                <a16:creationId xmlns:a16="http://schemas.microsoft.com/office/drawing/2014/main" id="{8EB4B462-8DD8-4846-BFDF-5293B038D1F6}"/>
               </a:ext>
             </a:extLst>
           </p:cNvPr>
@@ -6382,7 +6382,7 @@
           <p:cNvPr id="18" name="">
             <a:extLst xmlns:a="http://schemas.openxmlformats.org/drawingml/2006/main">
               <a:ext uri="{FF2B5EF4-FFF2-40B4-BE49-F238E27FC236}">
-                <a16:creationId xmlns:a16="http://schemas.microsoft.com/office/drawing/2014/main" id="{D1DE3CCB-F9FC-405F-BC7C-8CEA5A15C4C5}"/>
+                <a16:creationId xmlns:a16="http://schemas.microsoft.com/office/drawing/2014/main" id="{9FA8450A-E012-40A0-8F8F-946CF8D85F05}"/>
               </a:ext>
             </a:extLst>
           </p:cNvPr>
@@ -6416,7 +6416,7 @@
           <p:cNvPr id="19" name="">
             <a:extLst xmlns:a="http://schemas.openxmlformats.org/drawingml/2006/main">
               <a:ext uri="{FF2B5EF4-FFF2-40B4-BE49-F238E27FC236}">
-                <a16:creationId xmlns:a16="http://schemas.microsoft.com/office/drawing/2014/main" id="{44480E0D-A500-4154-878B-0C70A83321AA}"/>
+                <a16:creationId xmlns:a16="http://schemas.microsoft.com/office/drawing/2014/main" id="{E9B4F453-DDDC-4E79-B364-7CA75CE10F28}"/>
               </a:ext>
             </a:extLst>
           </p:cNvPr>
@@ -6448,7 +6448,7 @@
           <p:cNvPr id="20" name="">
             <a:extLst xmlns:a="http://schemas.openxmlformats.org/drawingml/2006/main">
               <a:ext uri="{FF2B5EF4-FFF2-40B4-BE49-F238E27FC236}">
-                <a16:creationId xmlns:a16="http://schemas.microsoft.com/office/drawing/2014/main" id="{077E7002-D836-4C79-B504-08DE5705FE6D}"/>
+                <a16:creationId xmlns:a16="http://schemas.microsoft.com/office/drawing/2014/main" id="{CB85574A-E412-4C71-88F3-B4097F65AD2A}"/>
               </a:ext>
             </a:extLst>
           </p:cNvPr>
@@ -6505,7 +6505,7 @@
           <p:cNvPr id="21" name="">
             <a:extLst xmlns:a="http://schemas.openxmlformats.org/drawingml/2006/main">
               <a:ext uri="{FF2B5EF4-FFF2-40B4-BE49-F238E27FC236}">
-                <a16:creationId xmlns:a16="http://schemas.microsoft.com/office/drawing/2014/main" id="{F411AFC6-0678-4F2C-836A-B81A11C8FA6D}"/>
+                <a16:creationId xmlns:a16="http://schemas.microsoft.com/office/drawing/2014/main" id="{3B333E60-5F2C-42DD-8038-9DFFAD749DDA}"/>
               </a:ext>
             </a:extLst>
           </p:cNvPr>
@@ -6562,7 +6562,7 @@
           <p:cNvPr id="22" name="">
             <a:extLst xmlns:a="http://schemas.openxmlformats.org/drawingml/2006/main">
               <a:ext uri="{FF2B5EF4-FFF2-40B4-BE49-F238E27FC236}">
-                <a16:creationId xmlns:a16="http://schemas.microsoft.com/office/drawing/2014/main" id="{8FD3D2F1-3ED0-4C92-9ECA-93EA7F112B52}"/>
+                <a16:creationId xmlns:a16="http://schemas.microsoft.com/office/drawing/2014/main" id="{56DB56EF-1DD2-4E52-8273-C4BC6408455B}"/>
               </a:ext>
             </a:extLst>
           </p:cNvPr>
@@ -6617,7 +6617,7 @@
     </p:spTree>
     <p:extLst>
       <p:ext uri="{BB962C8B-B14F-4D97-AF65-F5344CB8AC3E}">
-        <p14:creationId xmlns:p14="http://schemas.microsoft.com/office/powerpoint/2010/main" val="1408014415"/>
+        <p14:creationId xmlns:p14="http://schemas.microsoft.com/office/powerpoint/2010/main" val="1129125407"/>
       </p:ext>
     </p:extLst>
   </p:cSld>
@@ -6818,7 +6818,7 @@
           <p:cNvPr id="16" name="">
             <a:extLst xmlns:a="http://schemas.openxmlformats.org/drawingml/2006/main">
               <a:ext uri="{FF2B5EF4-FFF2-40B4-BE49-F238E27FC236}">
-                <a16:creationId xmlns:a16="http://schemas.microsoft.com/office/drawing/2014/main" id="{CEB71218-FAA9-4058-BE1A-8EC47F249873}"/>
+                <a16:creationId xmlns:a16="http://schemas.microsoft.com/office/drawing/2014/main" id="{DF8D3AB7-7B7D-470F-91BF-C58C1DEAB502}"/>
               </a:ext>
             </a:extLst>
           </p:cNvPr>
@@ -6850,7 +6850,7 @@
           <p:cNvPr id="2" name="">
             <a:extLst xmlns:a="http://schemas.openxmlformats.org/drawingml/2006/main">
               <a:ext uri="{FF2B5EF4-FFF2-40B4-BE49-F238E27FC236}">
-                <a16:creationId xmlns:a16="http://schemas.microsoft.com/office/drawing/2014/main" id="{21CA48BA-3A05-4961-AFC3-26E050869E20}"/>
+                <a16:creationId xmlns:a16="http://schemas.microsoft.com/office/drawing/2014/main" id="{B2EBB012-9B0B-475C-B302-FF39FABC66EC}"/>
               </a:ext>
             </a:extLst>
           </p:cNvPr>
@@ -6907,7 +6907,7 @@
           <p:cNvPr id="3" name="">
             <a:extLst xmlns:a="http://schemas.openxmlformats.org/drawingml/2006/main">
               <a:ext uri="{FF2B5EF4-FFF2-40B4-BE49-F238E27FC236}">
-                <a16:creationId xmlns:a16="http://schemas.microsoft.com/office/drawing/2014/main" id="{0F8BD0E2-F2CA-4F99-BC4F-EF5BBD5ADAE9}"/>
+                <a16:creationId xmlns:a16="http://schemas.microsoft.com/office/drawing/2014/main" id="{96C45739-623E-42DD-B4E9-8244462FF51E}"/>
               </a:ext>
             </a:extLst>
           </p:cNvPr>
@@ -6939,7 +6939,7 @@
           <p:cNvPr id="4" name="">
             <a:extLst xmlns:a="http://schemas.openxmlformats.org/drawingml/2006/main">
               <a:ext uri="{FF2B5EF4-FFF2-40B4-BE49-F238E27FC236}">
-                <a16:creationId xmlns:a16="http://schemas.microsoft.com/office/drawing/2014/main" id="{E4E827D2-D21A-4339-8263-868588D6286D}"/>
+                <a16:creationId xmlns:a16="http://schemas.microsoft.com/office/drawing/2014/main" id="{5F041FBE-C9AF-4342-83D7-45A57290F8F5}"/>
               </a:ext>
             </a:extLst>
           </p:cNvPr>
@@ -6996,7 +6996,7 @@
           <p:cNvPr id="5" name="">
             <a:extLst xmlns:a="http://schemas.openxmlformats.org/drawingml/2006/main">
               <a:ext uri="{FF2B5EF4-FFF2-40B4-BE49-F238E27FC236}">
-                <a16:creationId xmlns:a16="http://schemas.microsoft.com/office/drawing/2014/main" id="{5CB28418-F19C-4DFA-BCE9-76EAE1C1E625}"/>
+                <a16:creationId xmlns:a16="http://schemas.microsoft.com/office/drawing/2014/main" id="{9224AA19-C8F2-436B-9335-9E45886EDA01}"/>
               </a:ext>
             </a:extLst>
           </p:cNvPr>
@@ -7053,7 +7053,7 @@
           <p:cNvPr id="6" name="">
             <a:extLst xmlns:a="http://schemas.openxmlformats.org/drawingml/2006/main">
               <a:ext uri="{FF2B5EF4-FFF2-40B4-BE49-F238E27FC236}">
-                <a16:creationId xmlns:a16="http://schemas.microsoft.com/office/drawing/2014/main" id="{F3593B81-E6A8-4C1E-BC88-F9ECDA47424A}"/>
+                <a16:creationId xmlns:a16="http://schemas.microsoft.com/office/drawing/2014/main" id="{3F76C261-718A-407C-86F2-F31B3F443662}"/>
               </a:ext>
             </a:extLst>
           </p:cNvPr>
@@ -7110,7 +7110,7 @@
           <p:cNvPr id="7" name="">
             <a:extLst xmlns:a="http://schemas.openxmlformats.org/drawingml/2006/main">
               <a:ext uri="{FF2B5EF4-FFF2-40B4-BE49-F238E27FC236}">
-                <a16:creationId xmlns:a16="http://schemas.microsoft.com/office/drawing/2014/main" id="{B92E02C3-55E0-4FFF-8EBF-8669B4430143}"/>
+                <a16:creationId xmlns:a16="http://schemas.microsoft.com/office/drawing/2014/main" id="{3071B55C-F7E8-4061-A998-9DD732A0047C}"/>
               </a:ext>
             </a:extLst>
           </p:cNvPr>
@@ -7142,7 +7142,7 @@
           <p:cNvPr id="8" name="">
             <a:extLst xmlns:a="http://schemas.openxmlformats.org/drawingml/2006/main">
               <a:ext uri="{FF2B5EF4-FFF2-40B4-BE49-F238E27FC236}">
-                <a16:creationId xmlns:a16="http://schemas.microsoft.com/office/drawing/2014/main" id="{D571BAEB-B21D-4D5D-9228-80774ADE28C2}"/>
+                <a16:creationId xmlns:a16="http://schemas.microsoft.com/office/drawing/2014/main" id="{C80466B8-DEBA-4BC1-A897-EF2E408E20C3}"/>
               </a:ext>
             </a:extLst>
           </p:cNvPr>
@@ -7199,7 +7199,7 @@
           <p:cNvPr id="9" name="">
             <a:extLst xmlns:a="http://schemas.openxmlformats.org/drawingml/2006/main">
               <a:ext uri="{FF2B5EF4-FFF2-40B4-BE49-F238E27FC236}">
-                <a16:creationId xmlns:a16="http://schemas.microsoft.com/office/drawing/2014/main" id="{BD7A95C0-5146-44BC-9970-73B85FCA076C}"/>
+                <a16:creationId xmlns:a16="http://schemas.microsoft.com/office/drawing/2014/main" id="{D4B437EB-729A-457D-8510-9D380B34D61A}"/>
               </a:ext>
             </a:extLst>
           </p:cNvPr>
@@ -7256,7 +7256,7 @@
           <p:cNvPr id="10" name="">
             <a:extLst xmlns:a="http://schemas.openxmlformats.org/drawingml/2006/main">
               <a:ext uri="{FF2B5EF4-FFF2-40B4-BE49-F238E27FC236}">
-                <a16:creationId xmlns:a16="http://schemas.microsoft.com/office/drawing/2014/main" id="{E6D9E7C2-B1CE-4162-AD9E-C70DD6AB562C}"/>
+                <a16:creationId xmlns:a16="http://schemas.microsoft.com/office/drawing/2014/main" id="{88DF40E2-2D6E-43A3-AE8F-53DE8EE98DBF}"/>
               </a:ext>
             </a:extLst>
           </p:cNvPr>
@@ -7313,7 +7313,7 @@
           <p:cNvPr id="11" name="">
             <a:extLst xmlns:a="http://schemas.openxmlformats.org/drawingml/2006/main">
               <a:ext uri="{FF2B5EF4-FFF2-40B4-BE49-F238E27FC236}">
-                <a16:creationId xmlns:a16="http://schemas.microsoft.com/office/drawing/2014/main" id="{A381D249-0226-4B91-B506-E6E439B61303}"/>
+                <a16:creationId xmlns:a16="http://schemas.microsoft.com/office/drawing/2014/main" id="{11BFF13F-096C-4DDB-BCA6-8E48399C79EE}"/>
               </a:ext>
             </a:extLst>
           </p:cNvPr>
@@ -7345,7 +7345,7 @@
           <p:cNvPr id="12" name="">
             <a:extLst xmlns:a="http://schemas.openxmlformats.org/drawingml/2006/main">
               <a:ext uri="{FF2B5EF4-FFF2-40B4-BE49-F238E27FC236}">
-                <a16:creationId xmlns:a16="http://schemas.microsoft.com/office/drawing/2014/main" id="{D60C5937-82BD-4AC9-A3B6-9EC7EC02165B}"/>
+                <a16:creationId xmlns:a16="http://schemas.microsoft.com/office/drawing/2014/main" id="{62BC5671-7FD5-4538-8499-1750918A4E09}"/>
               </a:ext>
             </a:extLst>
           </p:cNvPr>
@@ -7402,7 +7402,7 @@
           <p:cNvPr id="13" name="">
             <a:extLst xmlns:a="http://schemas.openxmlformats.org/drawingml/2006/main">
               <a:ext uri="{FF2B5EF4-FFF2-40B4-BE49-F238E27FC236}">
-                <a16:creationId xmlns:a16="http://schemas.microsoft.com/office/drawing/2014/main" id="{E11F1A05-7FCF-4349-9DEB-CC0FE985F4ED}"/>
+                <a16:creationId xmlns:a16="http://schemas.microsoft.com/office/drawing/2014/main" id="{A466F36A-AA37-4C17-A627-8E651C3C2CE3}"/>
               </a:ext>
             </a:extLst>
           </p:cNvPr>
@@ -7459,7 +7459,7 @@
           <p:cNvPr id="14" name="">
             <a:extLst xmlns:a="http://schemas.openxmlformats.org/drawingml/2006/main">
               <a:ext uri="{FF2B5EF4-FFF2-40B4-BE49-F238E27FC236}">
-                <a16:creationId xmlns:a16="http://schemas.microsoft.com/office/drawing/2014/main" id="{6FB09CCF-24A4-4ECA-922E-36C5AB50AA77}"/>
+                <a16:creationId xmlns:a16="http://schemas.microsoft.com/office/drawing/2014/main" id="{DF697FA4-15AA-478A-B89C-60ECF3280447}"/>
               </a:ext>
             </a:extLst>
           </p:cNvPr>
@@ -7516,7 +7516,7 @@
           <p:cNvPr id="15" name="">
             <a:extLst xmlns:a="http://schemas.openxmlformats.org/drawingml/2006/main">
               <a:ext uri="{FF2B5EF4-FFF2-40B4-BE49-F238E27FC236}">
-                <a16:creationId xmlns:a16="http://schemas.microsoft.com/office/drawing/2014/main" id="{50A684D2-021A-405D-9B0C-DF53EA656450}"/>
+                <a16:creationId xmlns:a16="http://schemas.microsoft.com/office/drawing/2014/main" id="{646BD67E-D726-4069-B398-AE0E060D8D52}"/>
               </a:ext>
             </a:extLst>
           </p:cNvPr>
@@ -7571,7 +7571,7 @@
     </p:spTree>
     <p:extLst>
       <p:ext uri="{BB962C8B-B14F-4D97-AF65-F5344CB8AC3E}">
-        <p14:creationId xmlns:p14="http://schemas.microsoft.com/office/powerpoint/2010/main" val="175560009"/>
+        <p14:creationId xmlns:p14="http://schemas.microsoft.com/office/powerpoint/2010/main" val="1744336272"/>
       </p:ext>
     </p:extLst>
   </p:cSld>
@@ -7772,7 +7772,7 @@
           <p:cNvPr id="23" name="">
             <a:extLst xmlns:a="http://schemas.openxmlformats.org/drawingml/2006/main">
               <a:ext uri="{FF2B5EF4-FFF2-40B4-BE49-F238E27FC236}">
-                <a16:creationId xmlns:a16="http://schemas.microsoft.com/office/drawing/2014/main" id="{13393804-1382-41E2-BEEF-4A953AB809DE}"/>
+                <a16:creationId xmlns:a16="http://schemas.microsoft.com/office/drawing/2014/main" id="{AADE6177-778E-42EA-87AC-A001AE7D53F9}"/>
               </a:ext>
             </a:extLst>
           </p:cNvPr>
@@ -7804,7 +7804,7 @@
           <p:cNvPr id="2" name="">
             <a:extLst xmlns:a="http://schemas.openxmlformats.org/drawingml/2006/main">
               <a:ext uri="{FF2B5EF4-FFF2-40B4-BE49-F238E27FC236}">
-                <a16:creationId xmlns:a16="http://schemas.microsoft.com/office/drawing/2014/main" id="{D6EE048A-29F3-4FA4-8F64-314ECA1CC747}"/>
+                <a16:creationId xmlns:a16="http://schemas.microsoft.com/office/drawing/2014/main" id="{364A9772-F7EF-48E4-A5E1-907687D1A51E}"/>
               </a:ext>
             </a:extLst>
           </p:cNvPr>
@@ -7861,7 +7861,7 @@
           <p:cNvPr id="3" name="">
             <a:extLst xmlns:a="http://schemas.openxmlformats.org/drawingml/2006/main">
               <a:ext uri="{FF2B5EF4-FFF2-40B4-BE49-F238E27FC236}">
-                <a16:creationId xmlns:a16="http://schemas.microsoft.com/office/drawing/2014/main" id="{6D97E2FD-E71A-420F-ACB2-74CC44FA65BF}"/>
+                <a16:creationId xmlns:a16="http://schemas.microsoft.com/office/drawing/2014/main" id="{000A5665-96C0-4040-9E04-DA3EAEF4C806}"/>
               </a:ext>
             </a:extLst>
           </p:cNvPr>
@@ -7893,7 +7893,7 @@
           <p:cNvPr id="4" name="">
             <a:extLst xmlns:a="http://schemas.openxmlformats.org/drawingml/2006/main">
               <a:ext uri="{FF2B5EF4-FFF2-40B4-BE49-F238E27FC236}">
-                <a16:creationId xmlns:a16="http://schemas.microsoft.com/office/drawing/2014/main" id="{C1B229CA-2134-4831-9C3B-4C7959BE88BB}"/>
+                <a16:creationId xmlns:a16="http://schemas.microsoft.com/office/drawing/2014/main" id="{D86A9A96-1CD5-47FF-8550-13C56AE3F65C}"/>
               </a:ext>
             </a:extLst>
           </p:cNvPr>
@@ -7950,7 +7950,7 @@
           <p:cNvPr id="5" name="">
             <a:extLst xmlns:a="http://schemas.openxmlformats.org/drawingml/2006/main">
               <a:ext uri="{FF2B5EF4-FFF2-40B4-BE49-F238E27FC236}">
-                <a16:creationId xmlns:a16="http://schemas.microsoft.com/office/drawing/2014/main" id="{B194311B-C196-4C0E-9147-17594B5E62D9}"/>
+                <a16:creationId xmlns:a16="http://schemas.microsoft.com/office/drawing/2014/main" id="{5C992326-B8C9-4EB4-AD9E-52B852F351D1}"/>
               </a:ext>
             </a:extLst>
           </p:cNvPr>
@@ -8007,7 +8007,7 @@
           <p:cNvPr id="6" name="">
             <a:extLst xmlns:a="http://schemas.openxmlformats.org/drawingml/2006/main">
               <a:ext uri="{FF2B5EF4-FFF2-40B4-BE49-F238E27FC236}">
-                <a16:creationId xmlns:a16="http://schemas.microsoft.com/office/drawing/2014/main" id="{4E1EAE6E-33A0-427C-848B-AF30A9137705}"/>
+                <a16:creationId xmlns:a16="http://schemas.microsoft.com/office/drawing/2014/main" id="{A10BFF96-1C95-4AFC-B3BC-53649E955A14}"/>
               </a:ext>
             </a:extLst>
           </p:cNvPr>
@@ -8064,7 +8064,7 @@
           <p:cNvPr id="7" name="">
             <a:extLst xmlns:a="http://schemas.openxmlformats.org/drawingml/2006/main">
               <a:ext uri="{FF2B5EF4-FFF2-40B4-BE49-F238E27FC236}">
-                <a16:creationId xmlns:a16="http://schemas.microsoft.com/office/drawing/2014/main" id="{0D590108-8D7C-4114-B786-61B767E73D2A}"/>
+                <a16:creationId xmlns:a16="http://schemas.microsoft.com/office/drawing/2014/main" id="{A3031CF2-C5F2-4814-8E8E-18BE936C7D15}"/>
               </a:ext>
             </a:extLst>
           </p:cNvPr>
@@ -8096,7 +8096,7 @@
           <p:cNvPr id="8" name="">
             <a:extLst xmlns:a="http://schemas.openxmlformats.org/drawingml/2006/main">
               <a:ext uri="{FF2B5EF4-FFF2-40B4-BE49-F238E27FC236}">
-                <a16:creationId xmlns:a16="http://schemas.microsoft.com/office/drawing/2014/main" id="{45AC81FA-7470-4A68-90DC-FD1E4613C50E}"/>
+                <a16:creationId xmlns:a16="http://schemas.microsoft.com/office/drawing/2014/main" id="{0ADB6E9F-9BC3-416C-B3D4-D42C6236988A}"/>
               </a:ext>
             </a:extLst>
           </p:cNvPr>
@@ -8153,7 +8153,7 @@
           <p:cNvPr id="9" name="">
             <a:extLst xmlns:a="http://schemas.openxmlformats.org/drawingml/2006/main">
               <a:ext uri="{FF2B5EF4-FFF2-40B4-BE49-F238E27FC236}">
-                <a16:creationId xmlns:a16="http://schemas.microsoft.com/office/drawing/2014/main" id="{B89FC35C-5403-4740-B861-0160403A86C3}"/>
+                <a16:creationId xmlns:a16="http://schemas.microsoft.com/office/drawing/2014/main" id="{F21D715C-BF07-4C5F-9773-D8FF2DFEDDEC}"/>
               </a:ext>
             </a:extLst>
           </p:cNvPr>
@@ -8210,19 +8210,19 @@
           <p:cNvPr id="10" name="">
             <a:extLst xmlns:a="http://schemas.openxmlformats.org/drawingml/2006/main">
               <a:ext uri="{FF2B5EF4-FFF2-40B4-BE49-F238E27FC236}">
-                <a16:creationId xmlns:a16="http://schemas.microsoft.com/office/drawing/2014/main" id="{4DA0E162-F820-4B6D-B21B-D3B45A384678}"/>
-              </a:ext>
-            </a:extLst>
-          </p:cNvPr>
-          <p:cNvSpPr>
-            <a:spLocks xmlns:a="http://schemas.openxmlformats.org/drawingml/2006/main" noGrp="1"/>
-          </p:cNvSpPr>
-          <p:nvPr/>
-        </p:nvSpPr>
-        <p:spPr>
-          <a:xfrm xmlns:a="http://schemas.openxmlformats.org/drawingml/2006/main">
-            <a:off x="914400" y="1257300"/>
-            <a:ext cx="10363200" cy="781050"/>
+                <a16:creationId xmlns:a16="http://schemas.microsoft.com/office/drawing/2014/main" id="{3BC9C0B1-5C0C-4BBD-A3C1-F8D24CC11F32}"/>
+              </a:ext>
+            </a:extLst>
+          </p:cNvPr>
+          <p:cNvSpPr>
+            <a:spLocks xmlns:a="http://schemas.openxmlformats.org/drawingml/2006/main" noGrp="1"/>
+          </p:cNvSpPr>
+          <p:nvPr/>
+        </p:nvSpPr>
+        <p:spPr>
+          <a:xfrm xmlns:a="http://schemas.openxmlformats.org/drawingml/2006/main">
+            <a:off x="857250" y="1219200"/>
+            <a:ext cx="10477500" cy="742950"/>
           </a:xfrm>
           <a:prstGeom xmlns:a="http://schemas.openxmlformats.org/drawingml/2006/main" prst="rect">
             <a:avLst/>
@@ -8239,7 +8239,7 @@
           <a:lstStyle xmlns:a="http://schemas.openxmlformats.org/drawingml/2006/main"/>
           <a:p xmlns:a="http://schemas.openxmlformats.org/drawingml/2006/main">
             <a:pPr algn="ctr">
-              <a:defRPr sz="2175" b="1">
+              <a:defRPr sz="2100" b="1">
                 <a:solidFill>
                   <a:srgbClr val="17253A"/>
                 </a:solidFill>
@@ -8249,7 +8249,7 @@
               </a:defRPr>
             </a:pPr>
             <a:r>
-              <a:rPr sz="2175" b="1">
+              <a:rPr sz="2100" b="1">
                 <a:solidFill>
                   <a:srgbClr val="17253A"/>
                 </a:solidFill>
@@ -8267,28 +8267,30 @@
           <p:cNvPr id="11" name="">
             <a:extLst xmlns:a="http://schemas.openxmlformats.org/drawingml/2006/main">
               <a:ext uri="{FF2B5EF4-FFF2-40B4-BE49-F238E27FC236}">
-                <a16:creationId xmlns:a16="http://schemas.microsoft.com/office/drawing/2014/main" id="{79CD0E8D-830D-4665-B91D-C1994CE35411}"/>
-              </a:ext>
-            </a:extLst>
-          </p:cNvPr>
-          <p:cNvSpPr>
-            <a:spLocks xmlns:a="http://schemas.openxmlformats.org/drawingml/2006/main" noGrp="1"/>
-          </p:cNvSpPr>
-          <p:nvPr/>
-        </p:nvSpPr>
-        <p:spPr>
-          <a:xfrm xmlns:a="http://schemas.openxmlformats.org/drawingml/2006/main">
-            <a:off x="1000125" y="2247900"/>
-            <a:ext cx="476250" cy="476250"/>
-          </a:xfrm>
-          <a:prstGeom xmlns:a="http://schemas.openxmlformats.org/drawingml/2006/main" prst="ellipse">
+                <a16:creationId xmlns:a16="http://schemas.microsoft.com/office/drawing/2014/main" id="{D2379ABC-F875-44D1-BE16-5EF4415D95B0}"/>
+              </a:ext>
+            </a:extLst>
+          </p:cNvPr>
+          <p:cNvSpPr>
+            <a:spLocks xmlns:a="http://schemas.openxmlformats.org/drawingml/2006/main" noGrp="1"/>
+          </p:cNvSpPr>
+          <p:nvPr/>
+        </p:nvSpPr>
+        <p:spPr>
+          <a:xfrm xmlns:a="http://schemas.openxmlformats.org/drawingml/2006/main">
+            <a:off x="971550" y="2124075"/>
+            <a:ext cx="38100" cy="3524250"/>
+          </a:xfrm>
+          <a:prstGeom xmlns:a="http://schemas.openxmlformats.org/drawingml/2006/main" prst="rect">
             <a:avLst/>
           </a:prstGeom>
           <a:solidFill xmlns:a="http://schemas.openxmlformats.org/drawingml/2006/main">
-            <a:srgbClr val="18324A"/>
+            <a:srgbClr val="2C6E73"/>
           </a:solidFill>
           <a:ln xmlns:a="http://schemas.openxmlformats.org/drawingml/2006/main" w="0">
-            <a:noFill/>
+            <a:solidFill>
+              <a:srgbClr val="2C6E73"/>
+            </a:solidFill>
           </a:ln>
         </p:spPr>
       </p:sp>
@@ -8297,19 +8299,19 @@
           <p:cNvPr id="12" name="">
             <a:extLst xmlns:a="http://schemas.openxmlformats.org/drawingml/2006/main">
               <a:ext uri="{FF2B5EF4-FFF2-40B4-BE49-F238E27FC236}">
-                <a16:creationId xmlns:a16="http://schemas.microsoft.com/office/drawing/2014/main" id="{3211BDA1-994F-4A0B-A5F9-6105FC0D8ED5}"/>
-              </a:ext>
-            </a:extLst>
-          </p:cNvPr>
-          <p:cNvSpPr>
-            <a:spLocks xmlns:a="http://schemas.openxmlformats.org/drawingml/2006/main" noGrp="1"/>
-          </p:cNvSpPr>
-          <p:nvPr/>
-        </p:nvSpPr>
-        <p:spPr>
-          <a:xfrm xmlns:a="http://schemas.openxmlformats.org/drawingml/2006/main">
-            <a:off x="1000125" y="2276475"/>
-            <a:ext cx="476250" cy="419100"/>
+                <a16:creationId xmlns:a16="http://schemas.microsoft.com/office/drawing/2014/main" id="{4859A16E-DBE2-4887-A663-4456FB469866}"/>
+              </a:ext>
+            </a:extLst>
+          </p:cNvPr>
+          <p:cNvSpPr>
+            <a:spLocks xmlns:a="http://schemas.openxmlformats.org/drawingml/2006/main" noGrp="1"/>
+          </p:cNvSpPr>
+          <p:nvPr/>
+        </p:nvSpPr>
+        <p:spPr>
+          <a:xfrm xmlns:a="http://schemas.openxmlformats.org/drawingml/2006/main">
+            <a:off x="1162050" y="2200275"/>
+            <a:ext cx="400050" cy="400050"/>
           </a:xfrm>
           <a:prstGeom xmlns:a="http://schemas.openxmlformats.org/drawingml/2006/main" prst="rect">
             <a:avLst/>
@@ -8326,9 +8328,9 @@
           <a:lstStyle xmlns:a="http://schemas.openxmlformats.org/drawingml/2006/main"/>
           <a:p xmlns:a="http://schemas.openxmlformats.org/drawingml/2006/main">
             <a:pPr algn="ctr">
-              <a:defRPr sz="1350" b="1">
-                <a:solidFill>
-                  <a:srgbClr val="FFFFFF"/>
+              <a:defRPr sz="1125" b="1">
+                <a:solidFill>
+                  <a:srgbClr val="2C6E73"/>
                 </a:solidFill>
                 <a:latin typeface="Arial"/>
                 <a:ea typeface="Arial"/>
@@ -8336,9 +8338,9 @@
               </a:defRPr>
             </a:pPr>
             <a:r>
-              <a:rPr sz="1350" b="1">
-                <a:solidFill>
-                  <a:srgbClr val="FFFFFF"/>
+              <a:rPr sz="1125" b="1">
+                <a:solidFill>
+                  <a:srgbClr val="2C6E73"/>
                 </a:solidFill>
                 <a:latin typeface="Arial"/>
                 <a:ea typeface="Arial"/>
@@ -8354,19 +8356,19 @@
           <p:cNvPr id="13" name="">
             <a:extLst xmlns:a="http://schemas.openxmlformats.org/drawingml/2006/main">
               <a:ext uri="{FF2B5EF4-FFF2-40B4-BE49-F238E27FC236}">
-                <a16:creationId xmlns:a16="http://schemas.microsoft.com/office/drawing/2014/main" id="{3361A57F-168C-4C29-B8EB-EA61040F74B7}"/>
-              </a:ext>
-            </a:extLst>
-          </p:cNvPr>
-          <p:cNvSpPr>
-            <a:spLocks xmlns:a="http://schemas.openxmlformats.org/drawingml/2006/main" noGrp="1"/>
-          </p:cNvSpPr>
-          <p:nvPr/>
-        </p:nvSpPr>
-        <p:spPr>
-          <a:xfrm xmlns:a="http://schemas.openxmlformats.org/drawingml/2006/main">
-            <a:off x="1714500" y="2181225"/>
-            <a:ext cx="9429750" cy="609600"/>
+                <a16:creationId xmlns:a16="http://schemas.microsoft.com/office/drawing/2014/main" id="{E104A14E-1730-42C2-957B-627334B66BF8}"/>
+              </a:ext>
+            </a:extLst>
+          </p:cNvPr>
+          <p:cNvSpPr>
+            <a:spLocks xmlns:a="http://schemas.openxmlformats.org/drawingml/2006/main" noGrp="1"/>
+          </p:cNvSpPr>
+          <p:nvPr/>
+        </p:nvSpPr>
+        <p:spPr>
+          <a:xfrm xmlns:a="http://schemas.openxmlformats.org/drawingml/2006/main">
+            <a:off x="1714500" y="2114550"/>
+            <a:ext cx="9525000" cy="809625"/>
           </a:xfrm>
           <a:prstGeom xmlns:a="http://schemas.openxmlformats.org/drawingml/2006/main" prst="rect">
             <a:avLst/>
@@ -8383,7 +8385,7 @@
           <a:lstStyle xmlns:a="http://schemas.openxmlformats.org/drawingml/2006/main"/>
           <a:p xmlns:a="http://schemas.openxmlformats.org/drawingml/2006/main">
             <a:pPr algn="l">
-              <a:defRPr sz="1500" b="0">
+              <a:defRPr sz="1725" b="0">
                 <a:solidFill>
                   <a:srgbClr val="17253A"/>
                 </a:solidFill>
@@ -8393,7 +8395,7 @@
               </a:defRPr>
             </a:pPr>
             <a:r>
-              <a:rPr sz="1500" b="0">
+              <a:rPr sz="1725" b="0">
                 <a:solidFill>
                   <a:srgbClr val="17253A"/>
                 </a:solidFill>
@@ -8401,7 +8403,7 @@
                 <a:ea typeface="Arial"/>
                 <a:cs typeface="Arial"/>
               </a:rPr>
-              <a:t>Identify the structure: Identify the three perpendicular dimensions in one unit.</a:t>
+              <a:t>360 = 12 × 5 × height</a:t>
             </a:r>
           </a:p>
         </p:txBody>
@@ -8411,28 +8413,30 @@
           <p:cNvPr id="14" name="">
             <a:extLst xmlns:a="http://schemas.openxmlformats.org/drawingml/2006/main">
               <a:ext uri="{FF2B5EF4-FFF2-40B4-BE49-F238E27FC236}">
-                <a16:creationId xmlns:a16="http://schemas.microsoft.com/office/drawing/2014/main" id="{38D49B29-D326-4F47-8F69-A75FD4B27476}"/>
-              </a:ext>
-            </a:extLst>
-          </p:cNvPr>
-          <p:cNvSpPr>
-            <a:spLocks xmlns:a="http://schemas.openxmlformats.org/drawingml/2006/main" noGrp="1"/>
-          </p:cNvSpPr>
-          <p:nvPr/>
-        </p:nvSpPr>
-        <p:spPr>
-          <a:xfrm xmlns:a="http://schemas.openxmlformats.org/drawingml/2006/main">
-            <a:off x="1000125" y="2990850"/>
-            <a:ext cx="476250" cy="476250"/>
-          </a:xfrm>
-          <a:prstGeom xmlns:a="http://schemas.openxmlformats.org/drawingml/2006/main" prst="ellipse">
+                <a16:creationId xmlns:a16="http://schemas.microsoft.com/office/drawing/2014/main" id="{DDD9F272-CF7B-4B6E-8817-1934F2DE965E}"/>
+              </a:ext>
+            </a:extLst>
+          </p:cNvPr>
+          <p:cNvSpPr>
+            <a:spLocks xmlns:a="http://schemas.openxmlformats.org/drawingml/2006/main" noGrp="1"/>
+          </p:cNvSpPr>
+          <p:nvPr/>
+        </p:nvSpPr>
+        <p:spPr>
+          <a:xfrm xmlns:a="http://schemas.openxmlformats.org/drawingml/2006/main">
+            <a:off x="1714500" y="2943225"/>
+            <a:ext cx="9334500" cy="9525"/>
+          </a:xfrm>
+          <a:prstGeom xmlns:a="http://schemas.openxmlformats.org/drawingml/2006/main" prst="rect">
             <a:avLst/>
           </a:prstGeom>
           <a:solidFill xmlns:a="http://schemas.openxmlformats.org/drawingml/2006/main">
-            <a:srgbClr val="2C6E73"/>
+            <a:srgbClr val="D9E0E6"/>
           </a:solidFill>
           <a:ln xmlns:a="http://schemas.openxmlformats.org/drawingml/2006/main" w="0">
-            <a:noFill/>
+            <a:solidFill>
+              <a:srgbClr val="D9E0E6"/>
+            </a:solidFill>
           </a:ln>
         </p:spPr>
       </p:sp>
@@ -8441,19 +8445,19 @@
           <p:cNvPr id="15" name="">
             <a:extLst xmlns:a="http://schemas.openxmlformats.org/drawingml/2006/main">
               <a:ext uri="{FF2B5EF4-FFF2-40B4-BE49-F238E27FC236}">
-                <a16:creationId xmlns:a16="http://schemas.microsoft.com/office/drawing/2014/main" id="{F7C9CFA3-59BE-43BB-8E49-244D5D5D0333}"/>
-              </a:ext>
-            </a:extLst>
-          </p:cNvPr>
-          <p:cNvSpPr>
-            <a:spLocks xmlns:a="http://schemas.openxmlformats.org/drawingml/2006/main" noGrp="1"/>
-          </p:cNvSpPr>
-          <p:nvPr/>
-        </p:nvSpPr>
-        <p:spPr>
-          <a:xfrm xmlns:a="http://schemas.openxmlformats.org/drawingml/2006/main">
-            <a:off x="1000125" y="3019425"/>
-            <a:ext cx="476250" cy="419100"/>
+                <a16:creationId xmlns:a16="http://schemas.microsoft.com/office/drawing/2014/main" id="{63B67740-7BE7-4B84-A9FA-3424582D9D7B}"/>
+              </a:ext>
+            </a:extLst>
+          </p:cNvPr>
+          <p:cNvSpPr>
+            <a:spLocks xmlns:a="http://schemas.openxmlformats.org/drawingml/2006/main" noGrp="1"/>
+          </p:cNvSpPr>
+          <p:nvPr/>
+        </p:nvSpPr>
+        <p:spPr>
+          <a:xfrm xmlns:a="http://schemas.openxmlformats.org/drawingml/2006/main">
+            <a:off x="1162050" y="3076575"/>
+            <a:ext cx="400050" cy="400050"/>
           </a:xfrm>
           <a:prstGeom xmlns:a="http://schemas.openxmlformats.org/drawingml/2006/main" prst="rect">
             <a:avLst/>
@@ -8470,9 +8474,9 @@
           <a:lstStyle xmlns:a="http://schemas.openxmlformats.org/drawingml/2006/main"/>
           <a:p xmlns:a="http://schemas.openxmlformats.org/drawingml/2006/main">
             <a:pPr algn="ctr">
-              <a:defRPr sz="1350" b="1">
-                <a:solidFill>
-                  <a:srgbClr val="FFFFFF"/>
+              <a:defRPr sz="1125" b="1">
+                <a:solidFill>
+                  <a:srgbClr val="2C6E73"/>
                 </a:solidFill>
                 <a:latin typeface="Arial"/>
                 <a:ea typeface="Arial"/>
@@ -8480,9 +8484,9 @@
               </a:defRPr>
             </a:pPr>
             <a:r>
-              <a:rPr sz="1350" b="1">
-                <a:solidFill>
-                  <a:srgbClr val="FFFFFF"/>
+              <a:rPr sz="1125" b="1">
+                <a:solidFill>
+                  <a:srgbClr val="2C6E73"/>
                 </a:solidFill>
                 <a:latin typeface="Arial"/>
                 <a:ea typeface="Arial"/>
@@ -8498,19 +8502,19 @@
           <p:cNvPr id="16" name="">
             <a:extLst xmlns:a="http://schemas.openxmlformats.org/drawingml/2006/main">
               <a:ext uri="{FF2B5EF4-FFF2-40B4-BE49-F238E27FC236}">
-                <a16:creationId xmlns:a16="http://schemas.microsoft.com/office/drawing/2014/main" id="{538D06E9-696C-4272-9F52-A6B1A6010FAD}"/>
-              </a:ext>
-            </a:extLst>
-          </p:cNvPr>
-          <p:cNvSpPr>
-            <a:spLocks xmlns:a="http://schemas.openxmlformats.org/drawingml/2006/main" noGrp="1"/>
-          </p:cNvSpPr>
-          <p:nvPr/>
-        </p:nvSpPr>
-        <p:spPr>
-          <a:xfrm xmlns:a="http://schemas.openxmlformats.org/drawingml/2006/main">
-            <a:off x="1714500" y="2924175"/>
-            <a:ext cx="9429750" cy="609600"/>
+                <a16:creationId xmlns:a16="http://schemas.microsoft.com/office/drawing/2014/main" id="{69F9D62C-ED3E-41D1-8543-446E0922474D}"/>
+              </a:ext>
+            </a:extLst>
+          </p:cNvPr>
+          <p:cNvSpPr>
+            <a:spLocks xmlns:a="http://schemas.openxmlformats.org/drawingml/2006/main" noGrp="1"/>
+          </p:cNvSpPr>
+          <p:nvPr/>
+        </p:nvSpPr>
+        <p:spPr>
+          <a:xfrm xmlns:a="http://schemas.openxmlformats.org/drawingml/2006/main">
+            <a:off x="1714500" y="2990850"/>
+            <a:ext cx="9525000" cy="809625"/>
           </a:xfrm>
           <a:prstGeom xmlns:a="http://schemas.openxmlformats.org/drawingml/2006/main" prst="rect">
             <a:avLst/>
@@ -8527,7 +8531,7 @@
           <a:lstStyle xmlns:a="http://schemas.openxmlformats.org/drawingml/2006/main"/>
           <a:p xmlns:a="http://schemas.openxmlformats.org/drawingml/2006/main">
             <a:pPr algn="l">
-              <a:defRPr sz="1500" b="0">
+              <a:defRPr sz="1725" b="0">
                 <a:solidFill>
                   <a:srgbClr val="17253A"/>
                 </a:solidFill>
@@ -8537,7 +8541,7 @@
               </a:defRPr>
             </a:pPr>
             <a:r>
-              <a:rPr sz="1500" b="0">
+              <a:rPr sz="1725" b="0">
                 <a:solidFill>
                   <a:srgbClr val="17253A"/>
                 </a:solidFill>
@@ -8545,7 +8549,7 @@
                 <a:ea typeface="Arial"/>
                 <a:cs typeface="Arial"/>
               </a:rPr>
-              <a:t>Set up the method: Multiply length by width by height.</a:t>
+              <a:t>12 × 5 = 60</a:t>
             </a:r>
           </a:p>
         </p:txBody>
@@ -8555,28 +8559,30 @@
           <p:cNvPr id="17" name="">
             <a:extLst xmlns:a="http://schemas.openxmlformats.org/drawingml/2006/main">
               <a:ext uri="{FF2B5EF4-FFF2-40B4-BE49-F238E27FC236}">
-                <a16:creationId xmlns:a16="http://schemas.microsoft.com/office/drawing/2014/main" id="{2543FD05-7F0A-4F0F-821C-005A4BAFE253}"/>
-              </a:ext>
-            </a:extLst>
-          </p:cNvPr>
-          <p:cNvSpPr>
-            <a:spLocks xmlns:a="http://schemas.openxmlformats.org/drawingml/2006/main" noGrp="1"/>
-          </p:cNvSpPr>
-          <p:nvPr/>
-        </p:nvSpPr>
-        <p:spPr>
-          <a:xfrm xmlns:a="http://schemas.openxmlformats.org/drawingml/2006/main">
-            <a:off x="1000125" y="3733800"/>
-            <a:ext cx="476250" cy="476250"/>
-          </a:xfrm>
-          <a:prstGeom xmlns:a="http://schemas.openxmlformats.org/drawingml/2006/main" prst="ellipse">
+                <a16:creationId xmlns:a16="http://schemas.microsoft.com/office/drawing/2014/main" id="{FA14B514-BCC8-4D0C-8942-F6648BDB2AA8}"/>
+              </a:ext>
+            </a:extLst>
+          </p:cNvPr>
+          <p:cNvSpPr>
+            <a:spLocks xmlns:a="http://schemas.openxmlformats.org/drawingml/2006/main" noGrp="1"/>
+          </p:cNvSpPr>
+          <p:nvPr/>
+        </p:nvSpPr>
+        <p:spPr>
+          <a:xfrm xmlns:a="http://schemas.openxmlformats.org/drawingml/2006/main">
+            <a:off x="1714500" y="3819525"/>
+            <a:ext cx="9334500" cy="9525"/>
+          </a:xfrm>
+          <a:prstGeom xmlns:a="http://schemas.openxmlformats.org/drawingml/2006/main" prst="rect">
             <a:avLst/>
           </a:prstGeom>
           <a:solidFill xmlns:a="http://schemas.openxmlformats.org/drawingml/2006/main">
-            <a:srgbClr val="2C6E73"/>
+            <a:srgbClr val="D9E0E6"/>
           </a:solidFill>
           <a:ln xmlns:a="http://schemas.openxmlformats.org/drawingml/2006/main" w="0">
-            <a:noFill/>
+            <a:solidFill>
+              <a:srgbClr val="D9E0E6"/>
+            </a:solidFill>
           </a:ln>
         </p:spPr>
       </p:sp>
@@ -8585,19 +8591,19 @@
           <p:cNvPr id="18" name="">
             <a:extLst xmlns:a="http://schemas.openxmlformats.org/drawingml/2006/main">
               <a:ext uri="{FF2B5EF4-FFF2-40B4-BE49-F238E27FC236}">
-                <a16:creationId xmlns:a16="http://schemas.microsoft.com/office/drawing/2014/main" id="{B1AD4EF3-EFBB-41CD-BB1F-F61AF0AC0860}"/>
-              </a:ext>
-            </a:extLst>
-          </p:cNvPr>
-          <p:cNvSpPr>
-            <a:spLocks xmlns:a="http://schemas.openxmlformats.org/drawingml/2006/main" noGrp="1"/>
-          </p:cNvSpPr>
-          <p:nvPr/>
-        </p:nvSpPr>
-        <p:spPr>
-          <a:xfrm xmlns:a="http://schemas.openxmlformats.org/drawingml/2006/main">
-            <a:off x="1000125" y="3762375"/>
-            <a:ext cx="476250" cy="419100"/>
+                <a16:creationId xmlns:a16="http://schemas.microsoft.com/office/drawing/2014/main" id="{B5536B5B-AC32-47FC-A3FC-D8C756445726}"/>
+              </a:ext>
+            </a:extLst>
+          </p:cNvPr>
+          <p:cNvSpPr>
+            <a:spLocks xmlns:a="http://schemas.openxmlformats.org/drawingml/2006/main" noGrp="1"/>
+          </p:cNvSpPr>
+          <p:nvPr/>
+        </p:nvSpPr>
+        <p:spPr>
+          <a:xfrm xmlns:a="http://schemas.openxmlformats.org/drawingml/2006/main">
+            <a:off x="1162050" y="3952875"/>
+            <a:ext cx="400050" cy="400050"/>
           </a:xfrm>
           <a:prstGeom xmlns:a="http://schemas.openxmlformats.org/drawingml/2006/main" prst="rect">
             <a:avLst/>
@@ -8614,9 +8620,9 @@
           <a:lstStyle xmlns:a="http://schemas.openxmlformats.org/drawingml/2006/main"/>
           <a:p xmlns:a="http://schemas.openxmlformats.org/drawingml/2006/main">
             <a:pPr algn="ctr">
-              <a:defRPr sz="1350" b="1">
-                <a:solidFill>
-                  <a:srgbClr val="FFFFFF"/>
+              <a:defRPr sz="1125" b="1">
+                <a:solidFill>
+                  <a:srgbClr val="2C6E73"/>
                 </a:solidFill>
                 <a:latin typeface="Arial"/>
                 <a:ea typeface="Arial"/>
@@ -8624,9 +8630,9 @@
               </a:defRPr>
             </a:pPr>
             <a:r>
-              <a:rPr sz="1350" b="1">
-                <a:solidFill>
-                  <a:srgbClr val="FFFFFF"/>
+              <a:rPr sz="1125" b="1">
+                <a:solidFill>
+                  <a:srgbClr val="2C6E73"/>
                 </a:solidFill>
                 <a:latin typeface="Arial"/>
                 <a:ea typeface="Arial"/>
@@ -8642,19 +8648,19 @@
           <p:cNvPr id="19" name="">
             <a:extLst xmlns:a="http://schemas.openxmlformats.org/drawingml/2006/main">
               <a:ext uri="{FF2B5EF4-FFF2-40B4-BE49-F238E27FC236}">
-                <a16:creationId xmlns:a16="http://schemas.microsoft.com/office/drawing/2014/main" id="{D1FFCBCB-9D7D-405F-8A49-DDF768CA6010}"/>
-              </a:ext>
-            </a:extLst>
-          </p:cNvPr>
-          <p:cNvSpPr>
-            <a:spLocks xmlns:a="http://schemas.openxmlformats.org/drawingml/2006/main" noGrp="1"/>
-          </p:cNvSpPr>
-          <p:nvPr/>
-        </p:nvSpPr>
-        <p:spPr>
-          <a:xfrm xmlns:a="http://schemas.openxmlformats.org/drawingml/2006/main">
-            <a:off x="1714500" y="3667125"/>
-            <a:ext cx="9429750" cy="609600"/>
+                <a16:creationId xmlns:a16="http://schemas.microsoft.com/office/drawing/2014/main" id="{642C4A14-5692-40C5-B4D6-8B482819501D}"/>
+              </a:ext>
+            </a:extLst>
+          </p:cNvPr>
+          <p:cNvSpPr>
+            <a:spLocks xmlns:a="http://schemas.openxmlformats.org/drawingml/2006/main" noGrp="1"/>
+          </p:cNvSpPr>
+          <p:nvPr/>
+        </p:nvSpPr>
+        <p:spPr>
+          <a:xfrm xmlns:a="http://schemas.openxmlformats.org/drawingml/2006/main">
+            <a:off x="1714500" y="3867150"/>
+            <a:ext cx="9525000" cy="809625"/>
           </a:xfrm>
           <a:prstGeom xmlns:a="http://schemas.openxmlformats.org/drawingml/2006/main" prst="rect">
             <a:avLst/>
@@ -8671,7 +8677,7 @@
           <a:lstStyle xmlns:a="http://schemas.openxmlformats.org/drawingml/2006/main"/>
           <a:p xmlns:a="http://schemas.openxmlformats.org/drawingml/2006/main">
             <a:pPr algn="l">
-              <a:defRPr sz="1500" b="0">
+              <a:defRPr sz="1725" b="0">
                 <a:solidFill>
                   <a:srgbClr val="17253A"/>
                 </a:solidFill>
@@ -8681,7 +8687,7 @@
               </a:defRPr>
             </a:pPr>
             <a:r>
-              <a:rPr sz="1500" b="0">
+              <a:rPr sz="1725" b="0">
                 <a:solidFill>
                   <a:srgbClr val="17253A"/>
                 </a:solidFill>
@@ -8689,7 +8695,7 @@
                 <a:ea typeface="Arial"/>
                 <a:cs typeface="Arial"/>
               </a:rPr>
-              <a:t>Complete the calculation: 6 cm.</a:t>
+              <a:t>height = 360 ÷ 60</a:t>
             </a:r>
           </a:p>
         </p:txBody>
@@ -8699,28 +8705,30 @@
           <p:cNvPr id="20" name="">
             <a:extLst xmlns:a="http://schemas.openxmlformats.org/drawingml/2006/main">
               <a:ext uri="{FF2B5EF4-FFF2-40B4-BE49-F238E27FC236}">
-                <a16:creationId xmlns:a16="http://schemas.microsoft.com/office/drawing/2014/main" id="{688BE0D9-A018-494E-B006-DB9CD61F7417}"/>
-              </a:ext>
-            </a:extLst>
-          </p:cNvPr>
-          <p:cNvSpPr>
-            <a:spLocks xmlns:a="http://schemas.openxmlformats.org/drawingml/2006/main" noGrp="1"/>
-          </p:cNvSpPr>
-          <p:nvPr/>
-        </p:nvSpPr>
-        <p:spPr>
-          <a:xfrm xmlns:a="http://schemas.openxmlformats.org/drawingml/2006/main">
-            <a:off x="1000125" y="4476750"/>
-            <a:ext cx="476250" cy="476250"/>
-          </a:xfrm>
-          <a:prstGeom xmlns:a="http://schemas.openxmlformats.org/drawingml/2006/main" prst="ellipse">
+                <a16:creationId xmlns:a16="http://schemas.microsoft.com/office/drawing/2014/main" id="{81B0205C-B57C-46BE-9569-79D92AFDAFF8}"/>
+              </a:ext>
+            </a:extLst>
+          </p:cNvPr>
+          <p:cNvSpPr>
+            <a:spLocks xmlns:a="http://schemas.openxmlformats.org/drawingml/2006/main" noGrp="1"/>
+          </p:cNvSpPr>
+          <p:nvPr/>
+        </p:nvSpPr>
+        <p:spPr>
+          <a:xfrm xmlns:a="http://schemas.openxmlformats.org/drawingml/2006/main">
+            <a:off x="1714500" y="4695825"/>
+            <a:ext cx="9334500" cy="9525"/>
+          </a:xfrm>
+          <a:prstGeom xmlns:a="http://schemas.openxmlformats.org/drawingml/2006/main" prst="rect">
             <a:avLst/>
           </a:prstGeom>
           <a:solidFill xmlns:a="http://schemas.openxmlformats.org/drawingml/2006/main">
-            <a:srgbClr val="2C6E73"/>
+            <a:srgbClr val="D9E0E6"/>
           </a:solidFill>
           <a:ln xmlns:a="http://schemas.openxmlformats.org/drawingml/2006/main" w="0">
-            <a:noFill/>
+            <a:solidFill>
+              <a:srgbClr val="D9E0E6"/>
+            </a:solidFill>
           </a:ln>
         </p:spPr>
       </p:sp>
@@ -8729,19 +8737,19 @@
           <p:cNvPr id="21" name="">
             <a:extLst xmlns:a="http://schemas.openxmlformats.org/drawingml/2006/main">
               <a:ext uri="{FF2B5EF4-FFF2-40B4-BE49-F238E27FC236}">
-                <a16:creationId xmlns:a16="http://schemas.microsoft.com/office/drawing/2014/main" id="{326412DC-5687-471F-BDDD-999F6708BF6F}"/>
-              </a:ext>
-            </a:extLst>
-          </p:cNvPr>
-          <p:cNvSpPr>
-            <a:spLocks xmlns:a="http://schemas.openxmlformats.org/drawingml/2006/main" noGrp="1"/>
-          </p:cNvSpPr>
-          <p:nvPr/>
-        </p:nvSpPr>
-        <p:spPr>
-          <a:xfrm xmlns:a="http://schemas.openxmlformats.org/drawingml/2006/main">
-            <a:off x="1000125" y="4505325"/>
-            <a:ext cx="476250" cy="419100"/>
+                <a16:creationId xmlns:a16="http://schemas.microsoft.com/office/drawing/2014/main" id="{BB76DB2F-95A6-4AE5-BF36-217C3D444BB5}"/>
+              </a:ext>
+            </a:extLst>
+          </p:cNvPr>
+          <p:cNvSpPr>
+            <a:spLocks xmlns:a="http://schemas.openxmlformats.org/drawingml/2006/main" noGrp="1"/>
+          </p:cNvSpPr>
+          <p:nvPr/>
+        </p:nvSpPr>
+        <p:spPr>
+          <a:xfrm xmlns:a="http://schemas.openxmlformats.org/drawingml/2006/main">
+            <a:off x="1162050" y="4829175"/>
+            <a:ext cx="400050" cy="400050"/>
           </a:xfrm>
           <a:prstGeom xmlns:a="http://schemas.openxmlformats.org/drawingml/2006/main" prst="rect">
             <a:avLst/>
@@ -8758,9 +8766,9 @@
           <a:lstStyle xmlns:a="http://schemas.openxmlformats.org/drawingml/2006/main"/>
           <a:p xmlns:a="http://schemas.openxmlformats.org/drawingml/2006/main">
             <a:pPr algn="ctr">
-              <a:defRPr sz="1350" b="1">
-                <a:solidFill>
-                  <a:srgbClr val="FFFFFF"/>
+              <a:defRPr sz="1125" b="1">
+                <a:solidFill>
+                  <a:srgbClr val="2F785D"/>
                 </a:solidFill>
                 <a:latin typeface="Arial"/>
                 <a:ea typeface="Arial"/>
@@ -8768,9 +8776,9 @@
               </a:defRPr>
             </a:pPr>
             <a:r>
-              <a:rPr sz="1350" b="1">
-                <a:solidFill>
-                  <a:srgbClr val="FFFFFF"/>
+              <a:rPr sz="1125" b="1">
+                <a:solidFill>
+                  <a:srgbClr val="2F785D"/>
                 </a:solidFill>
                 <a:latin typeface="Arial"/>
                 <a:ea typeface="Arial"/>
@@ -8786,19 +8794,19 @@
           <p:cNvPr id="22" name="">
             <a:extLst xmlns:a="http://schemas.openxmlformats.org/drawingml/2006/main">
               <a:ext uri="{FF2B5EF4-FFF2-40B4-BE49-F238E27FC236}">
-                <a16:creationId xmlns:a16="http://schemas.microsoft.com/office/drawing/2014/main" id="{280550B3-5564-4A60-8559-3905C555A7E5}"/>
-              </a:ext>
-            </a:extLst>
-          </p:cNvPr>
-          <p:cNvSpPr>
-            <a:spLocks xmlns:a="http://schemas.openxmlformats.org/drawingml/2006/main" noGrp="1"/>
-          </p:cNvSpPr>
-          <p:nvPr/>
-        </p:nvSpPr>
-        <p:spPr>
-          <a:xfrm xmlns:a="http://schemas.openxmlformats.org/drawingml/2006/main">
-            <a:off x="1714500" y="4410075"/>
-            <a:ext cx="9429750" cy="609600"/>
+                <a16:creationId xmlns:a16="http://schemas.microsoft.com/office/drawing/2014/main" id="{D9DEE2B1-498C-45D7-9586-D781590CE9DA}"/>
+              </a:ext>
+            </a:extLst>
+          </p:cNvPr>
+          <p:cNvSpPr>
+            <a:spLocks xmlns:a="http://schemas.openxmlformats.org/drawingml/2006/main" noGrp="1"/>
+          </p:cNvSpPr>
+          <p:nvPr/>
+        </p:nvSpPr>
+        <p:spPr>
+          <a:xfrm xmlns:a="http://schemas.openxmlformats.org/drawingml/2006/main">
+            <a:off x="1714500" y="4743450"/>
+            <a:ext cx="9525000" cy="809625"/>
           </a:xfrm>
           <a:prstGeom xmlns:a="http://schemas.openxmlformats.org/drawingml/2006/main" prst="rect">
             <a:avLst/>
@@ -8815,7 +8823,7 @@
           <a:lstStyle xmlns:a="http://schemas.openxmlformats.org/drawingml/2006/main"/>
           <a:p xmlns:a="http://schemas.openxmlformats.org/drawingml/2006/main">
             <a:pPr algn="l">
-              <a:defRPr sz="1500" b="1">
+              <a:defRPr sz="1725" b="1">
                 <a:solidFill>
                   <a:srgbClr val="2F785D"/>
                 </a:solidFill>
@@ -8825,7 +8833,7 @@
               </a:defRPr>
             </a:pPr>
             <a:r>
-              <a:rPr sz="1500" b="1">
+              <a:rPr sz="1725" b="1">
                 <a:solidFill>
                   <a:srgbClr val="2F785D"/>
                 </a:solidFill>
@@ -8833,7 +8841,7 @@
                 <a:ea typeface="Arial"/>
                 <a:cs typeface="Arial"/>
               </a:rPr>
-              <a:t>Check the result: Use cubic units and compare the result with an estimate.</a:t>
+              <a:t>height = 6 cm</a:t>
             </a:r>
           </a:p>
         </p:txBody>
@@ -8841,7 +8849,7 @@
     </p:spTree>
     <p:extLst>
       <p:ext uri="{BB962C8B-B14F-4D97-AF65-F5344CB8AC3E}">
-        <p14:creationId xmlns:p14="http://schemas.microsoft.com/office/powerpoint/2010/main" val="2047907654"/>
+        <p14:creationId xmlns:p14="http://schemas.microsoft.com/office/powerpoint/2010/main" val="200195678"/>
       </p:ext>
     </p:extLst>
   </p:cSld>
@@ -9134,7 +9142,7 @@
           <p:cNvPr id="15" name="">
             <a:extLst xmlns:a="http://schemas.openxmlformats.org/drawingml/2006/main">
               <a:ext uri="{FF2B5EF4-FFF2-40B4-BE49-F238E27FC236}">
-                <a16:creationId xmlns:a16="http://schemas.microsoft.com/office/drawing/2014/main" id="{137C9EFF-4A20-41A1-9B66-4D374A3C7F50}"/>
+                <a16:creationId xmlns:a16="http://schemas.microsoft.com/office/drawing/2014/main" id="{363D96C3-7213-4D12-A2F0-3B27A91BBD2D}"/>
               </a:ext>
             </a:extLst>
           </p:cNvPr>
@@ -9166,7 +9174,7 @@
           <p:cNvPr id="2" name="">
             <a:extLst xmlns:a="http://schemas.openxmlformats.org/drawingml/2006/main">
               <a:ext uri="{FF2B5EF4-FFF2-40B4-BE49-F238E27FC236}">
-                <a16:creationId xmlns:a16="http://schemas.microsoft.com/office/drawing/2014/main" id="{18161DF1-B322-44C0-85E8-51CD1BCECE8A}"/>
+                <a16:creationId xmlns:a16="http://schemas.microsoft.com/office/drawing/2014/main" id="{7CA46CEF-B65F-4867-B282-6C2D2575AD56}"/>
               </a:ext>
             </a:extLst>
           </p:cNvPr>
@@ -9223,7 +9231,7 @@
           <p:cNvPr id="3" name="">
             <a:extLst xmlns:a="http://schemas.openxmlformats.org/drawingml/2006/main">
               <a:ext uri="{FF2B5EF4-FFF2-40B4-BE49-F238E27FC236}">
-                <a16:creationId xmlns:a16="http://schemas.microsoft.com/office/drawing/2014/main" id="{5A1CE165-6E7D-44EA-8989-63E3CC8D8ECF}"/>
+                <a16:creationId xmlns:a16="http://schemas.microsoft.com/office/drawing/2014/main" id="{268530B4-A7E6-4960-80CC-5313D9A9029B}"/>
               </a:ext>
             </a:extLst>
           </p:cNvPr>
@@ -9255,7 +9263,7 @@
           <p:cNvPr id="4" name="">
             <a:extLst xmlns:a="http://schemas.openxmlformats.org/drawingml/2006/main">
               <a:ext uri="{FF2B5EF4-FFF2-40B4-BE49-F238E27FC236}">
-                <a16:creationId xmlns:a16="http://schemas.microsoft.com/office/drawing/2014/main" id="{77AB3D12-85C9-4276-8A7F-3C54E9A23E3B}"/>
+                <a16:creationId xmlns:a16="http://schemas.microsoft.com/office/drawing/2014/main" id="{2F9B5C8C-4A59-46A5-A1B1-8D27FD19F0BC}"/>
               </a:ext>
             </a:extLst>
           </p:cNvPr>
@@ -9312,7 +9320,7 @@
           <p:cNvPr id="5" name="">
             <a:extLst xmlns:a="http://schemas.openxmlformats.org/drawingml/2006/main">
               <a:ext uri="{FF2B5EF4-FFF2-40B4-BE49-F238E27FC236}">
-                <a16:creationId xmlns:a16="http://schemas.microsoft.com/office/drawing/2014/main" id="{6DFC40B8-A6E4-4E1C-A5B9-FB43E6E43086}"/>
+                <a16:creationId xmlns:a16="http://schemas.microsoft.com/office/drawing/2014/main" id="{6755EDF4-82F0-40D0-B6AF-BC68AE8B4CA2}"/>
               </a:ext>
             </a:extLst>
           </p:cNvPr>
@@ -9369,7 +9377,7 @@
           <p:cNvPr id="6" name="">
             <a:extLst xmlns:a="http://schemas.openxmlformats.org/drawingml/2006/main">
               <a:ext uri="{FF2B5EF4-FFF2-40B4-BE49-F238E27FC236}">
-                <a16:creationId xmlns:a16="http://schemas.microsoft.com/office/drawing/2014/main" id="{69F74D84-3461-4E90-99EA-6EA7BF51288B}"/>
+                <a16:creationId xmlns:a16="http://schemas.microsoft.com/office/drawing/2014/main" id="{199A662F-9F79-4913-BB69-40B0017DFA40}"/>
               </a:ext>
             </a:extLst>
           </p:cNvPr>
@@ -9426,7 +9434,7 @@
           <p:cNvPr id="7" name="">
             <a:extLst xmlns:a="http://schemas.openxmlformats.org/drawingml/2006/main">
               <a:ext uri="{FF2B5EF4-FFF2-40B4-BE49-F238E27FC236}">
-                <a16:creationId xmlns:a16="http://schemas.microsoft.com/office/drawing/2014/main" id="{97AED185-3661-4525-86F1-ED084AC721C3}"/>
+                <a16:creationId xmlns:a16="http://schemas.microsoft.com/office/drawing/2014/main" id="{5A835353-128A-4F03-A92E-264367D226CB}"/>
               </a:ext>
             </a:extLst>
           </p:cNvPr>
@@ -9458,7 +9466,7 @@
           <p:cNvPr id="8" name="">
             <a:extLst xmlns:a="http://schemas.openxmlformats.org/drawingml/2006/main">
               <a:ext uri="{FF2B5EF4-FFF2-40B4-BE49-F238E27FC236}">
-                <a16:creationId xmlns:a16="http://schemas.microsoft.com/office/drawing/2014/main" id="{4E7D2954-C49B-45BF-B33F-EF630B3400AF}"/>
+                <a16:creationId xmlns:a16="http://schemas.microsoft.com/office/drawing/2014/main" id="{63B81A7D-A7E9-439B-89CE-78C3C547BA9F}"/>
               </a:ext>
             </a:extLst>
           </p:cNvPr>
@@ -9515,7 +9523,7 @@
           <p:cNvPr id="9" name="">
             <a:extLst xmlns:a="http://schemas.openxmlformats.org/drawingml/2006/main">
               <a:ext uri="{FF2B5EF4-FFF2-40B4-BE49-F238E27FC236}">
-                <a16:creationId xmlns:a16="http://schemas.microsoft.com/office/drawing/2014/main" id="{459A2D6A-5728-42D9-BD73-9E4D272C4740}"/>
+                <a16:creationId xmlns:a16="http://schemas.microsoft.com/office/drawing/2014/main" id="{A17CD61C-1F55-466D-AEF0-114DC1B657C0}"/>
               </a:ext>
             </a:extLst>
           </p:cNvPr>
@@ -9572,7 +9580,7 @@
           <p:cNvPr id="10" name="">
             <a:extLst xmlns:a="http://schemas.openxmlformats.org/drawingml/2006/main">
               <a:ext uri="{FF2B5EF4-FFF2-40B4-BE49-F238E27FC236}">
-                <a16:creationId xmlns:a16="http://schemas.microsoft.com/office/drawing/2014/main" id="{BA695D45-2DC7-4FD2-BDEF-5547A0D7E5C6}"/>
+                <a16:creationId xmlns:a16="http://schemas.microsoft.com/office/drawing/2014/main" id="{27295BEB-00E0-425C-924A-D5C3CC9C9E0D}"/>
               </a:ext>
             </a:extLst>
           </p:cNvPr>
@@ -9629,7 +9637,7 @@
           <p:cNvPr id="11" name="">
             <a:extLst xmlns:a="http://schemas.openxmlformats.org/drawingml/2006/main">
               <a:ext uri="{FF2B5EF4-FFF2-40B4-BE49-F238E27FC236}">
-                <a16:creationId xmlns:a16="http://schemas.microsoft.com/office/drawing/2014/main" id="{82D827CA-0ED1-4E16-9808-D2C5DC7FA2AD}"/>
+                <a16:creationId xmlns:a16="http://schemas.microsoft.com/office/drawing/2014/main" id="{1980BBC0-B40C-4C26-A2BA-2A9FE23802C4}"/>
               </a:ext>
             </a:extLst>
           </p:cNvPr>
@@ -9686,7 +9694,7 @@
           <p:cNvPr id="12" name="">
             <a:extLst xmlns:a="http://schemas.openxmlformats.org/drawingml/2006/main">
               <a:ext uri="{FF2B5EF4-FFF2-40B4-BE49-F238E27FC236}">
-                <a16:creationId xmlns:a16="http://schemas.microsoft.com/office/drawing/2014/main" id="{C24E0E84-2EBA-4737-917F-C1A8247E07C1}"/>
+                <a16:creationId xmlns:a16="http://schemas.microsoft.com/office/drawing/2014/main" id="{AC408FA1-324C-4176-AEBD-01100C2523EE}"/>
               </a:ext>
             </a:extLst>
           </p:cNvPr>
@@ -9718,7 +9726,7 @@
           <p:cNvPr id="13" name="">
             <a:extLst xmlns:a="http://schemas.openxmlformats.org/drawingml/2006/main">
               <a:ext uri="{FF2B5EF4-FFF2-40B4-BE49-F238E27FC236}">
-                <a16:creationId xmlns:a16="http://schemas.microsoft.com/office/drawing/2014/main" id="{CFF89ACE-E0B5-421A-AF75-92CE9C2AAC79}"/>
+                <a16:creationId xmlns:a16="http://schemas.microsoft.com/office/drawing/2014/main" id="{03632131-9315-410E-8F2B-B092F35BB142}"/>
               </a:ext>
             </a:extLst>
           </p:cNvPr>
@@ -9775,7 +9783,7 @@
           <p:cNvPr id="14" name="">
             <a:extLst xmlns:a="http://schemas.openxmlformats.org/drawingml/2006/main">
               <a:ext uri="{FF2B5EF4-FFF2-40B4-BE49-F238E27FC236}">
-                <a16:creationId xmlns:a16="http://schemas.microsoft.com/office/drawing/2014/main" id="{547F1E4C-89C7-47E8-A20C-4992C11B5456}"/>
+                <a16:creationId xmlns:a16="http://schemas.microsoft.com/office/drawing/2014/main" id="{CC715ECC-97D2-45C0-880B-540A04A0CE1F}"/>
               </a:ext>
             </a:extLst>
           </p:cNvPr>
@@ -9830,7 +9838,7 @@
     </p:spTree>
     <p:extLst>
       <p:ext uri="{BB962C8B-B14F-4D97-AF65-F5344CB8AC3E}">
-        <p14:creationId xmlns:p14="http://schemas.microsoft.com/office/powerpoint/2010/main" val="1370998595"/>
+        <p14:creationId xmlns:p14="http://schemas.microsoft.com/office/powerpoint/2010/main" val="800139910"/>
       </p:ext>
     </p:extLst>
   </p:cSld>
@@ -10031,7 +10039,7 @@
           <p:cNvPr id="16" name="">
             <a:extLst xmlns:a="http://schemas.openxmlformats.org/drawingml/2006/main">
               <a:ext uri="{FF2B5EF4-FFF2-40B4-BE49-F238E27FC236}">
-                <a16:creationId xmlns:a16="http://schemas.microsoft.com/office/drawing/2014/main" id="{A03C3215-B8BF-4BAC-B5C5-C25B848187B5}"/>
+                <a16:creationId xmlns:a16="http://schemas.microsoft.com/office/drawing/2014/main" id="{D7447D90-D83B-4C21-B090-97F996F9E013}"/>
               </a:ext>
             </a:extLst>
           </p:cNvPr>
@@ -10063,7 +10071,7 @@
           <p:cNvPr id="2" name="">
             <a:extLst xmlns:a="http://schemas.openxmlformats.org/drawingml/2006/main">
               <a:ext uri="{FF2B5EF4-FFF2-40B4-BE49-F238E27FC236}">
-                <a16:creationId xmlns:a16="http://schemas.microsoft.com/office/drawing/2014/main" id="{35E1900C-33B5-4F0E-8981-B6C8F22EBB05}"/>
+                <a16:creationId xmlns:a16="http://schemas.microsoft.com/office/drawing/2014/main" id="{A8825AEB-815A-4FF9-AE88-00E3C5EDE8A9}"/>
               </a:ext>
             </a:extLst>
           </p:cNvPr>
@@ -10120,7 +10128,7 @@
           <p:cNvPr id="3" name="">
             <a:extLst xmlns:a="http://schemas.openxmlformats.org/drawingml/2006/main">
               <a:ext uri="{FF2B5EF4-FFF2-40B4-BE49-F238E27FC236}">
-                <a16:creationId xmlns:a16="http://schemas.microsoft.com/office/drawing/2014/main" id="{1CF9E7A2-FF04-47C5-8A15-3FF72BDA4BE5}"/>
+                <a16:creationId xmlns:a16="http://schemas.microsoft.com/office/drawing/2014/main" id="{FBEF48DE-5314-4B3C-902B-03822AB1ADBC}"/>
               </a:ext>
             </a:extLst>
           </p:cNvPr>
@@ -10152,7 +10160,7 @@
           <p:cNvPr id="4" name="">
             <a:extLst xmlns:a="http://schemas.openxmlformats.org/drawingml/2006/main">
               <a:ext uri="{FF2B5EF4-FFF2-40B4-BE49-F238E27FC236}">
-                <a16:creationId xmlns:a16="http://schemas.microsoft.com/office/drawing/2014/main" id="{F28EAB34-00F4-401A-9B05-D18BB117B6E7}"/>
+                <a16:creationId xmlns:a16="http://schemas.microsoft.com/office/drawing/2014/main" id="{CAAAFEEA-8E17-414C-B19B-062A515704A4}"/>
               </a:ext>
             </a:extLst>
           </p:cNvPr>
@@ -10209,7 +10217,7 @@
           <p:cNvPr id="5" name="">
             <a:extLst xmlns:a="http://schemas.openxmlformats.org/drawingml/2006/main">
               <a:ext uri="{FF2B5EF4-FFF2-40B4-BE49-F238E27FC236}">
-                <a16:creationId xmlns:a16="http://schemas.microsoft.com/office/drawing/2014/main" id="{7BCF7043-8771-4498-8724-72E577737240}"/>
+                <a16:creationId xmlns:a16="http://schemas.microsoft.com/office/drawing/2014/main" id="{EBD47A15-3FD0-41EB-B40B-9171F52DD806}"/>
               </a:ext>
             </a:extLst>
           </p:cNvPr>
@@ -10266,7 +10274,7 @@
           <p:cNvPr id="6" name="">
             <a:extLst xmlns:a="http://schemas.openxmlformats.org/drawingml/2006/main">
               <a:ext uri="{FF2B5EF4-FFF2-40B4-BE49-F238E27FC236}">
-                <a16:creationId xmlns:a16="http://schemas.microsoft.com/office/drawing/2014/main" id="{02B6E297-59EF-455A-A85F-DF572D661578}"/>
+                <a16:creationId xmlns:a16="http://schemas.microsoft.com/office/drawing/2014/main" id="{2A1DD876-3528-4AAE-B148-82D949BB404E}"/>
               </a:ext>
             </a:extLst>
           </p:cNvPr>
@@ -10323,7 +10331,7 @@
           <p:cNvPr id="7" name="">
             <a:extLst xmlns:a="http://schemas.openxmlformats.org/drawingml/2006/main">
               <a:ext uri="{FF2B5EF4-FFF2-40B4-BE49-F238E27FC236}">
-                <a16:creationId xmlns:a16="http://schemas.microsoft.com/office/drawing/2014/main" id="{5F899AED-F7C5-406C-B1F5-61DDA36FC60C}"/>
+                <a16:creationId xmlns:a16="http://schemas.microsoft.com/office/drawing/2014/main" id="{2BD40503-D2E0-427F-A8CF-0B4C1C1A5CCC}"/>
               </a:ext>
             </a:extLst>
           </p:cNvPr>
@@ -10355,7 +10363,7 @@
           <p:cNvPr id="8" name="">
             <a:extLst xmlns:a="http://schemas.openxmlformats.org/drawingml/2006/main">
               <a:ext uri="{FF2B5EF4-FFF2-40B4-BE49-F238E27FC236}">
-                <a16:creationId xmlns:a16="http://schemas.microsoft.com/office/drawing/2014/main" id="{CBCEBD9E-DA24-40A3-964B-BB6C7587343A}"/>
+                <a16:creationId xmlns:a16="http://schemas.microsoft.com/office/drawing/2014/main" id="{D5C7F226-37E2-42E2-9B96-5360986412CD}"/>
               </a:ext>
             </a:extLst>
           </p:cNvPr>
@@ -10412,7 +10420,7 @@
           <p:cNvPr id="9" name="">
             <a:extLst xmlns:a="http://schemas.openxmlformats.org/drawingml/2006/main">
               <a:ext uri="{FF2B5EF4-FFF2-40B4-BE49-F238E27FC236}">
-                <a16:creationId xmlns:a16="http://schemas.microsoft.com/office/drawing/2014/main" id="{7CEC6C62-8CB9-463B-AAFA-C18FCBC2B75A}"/>
+                <a16:creationId xmlns:a16="http://schemas.microsoft.com/office/drawing/2014/main" id="{7EE38074-E53F-4EDC-8A35-AC7AD3912A27}"/>
               </a:ext>
             </a:extLst>
           </p:cNvPr>
@@ -10469,7 +10477,7 @@
           <p:cNvPr id="10" name="">
             <a:extLst xmlns:a="http://schemas.openxmlformats.org/drawingml/2006/main">
               <a:ext uri="{FF2B5EF4-FFF2-40B4-BE49-F238E27FC236}">
-                <a16:creationId xmlns:a16="http://schemas.microsoft.com/office/drawing/2014/main" id="{5E886E01-CB89-4CA7-85C1-014CC1FABBCE}"/>
+                <a16:creationId xmlns:a16="http://schemas.microsoft.com/office/drawing/2014/main" id="{B91E25A0-E8CE-4FC8-BD1F-16E48F166D49}"/>
               </a:ext>
             </a:extLst>
           </p:cNvPr>
@@ -10526,7 +10534,7 @@
           <p:cNvPr id="11" name="">
             <a:extLst xmlns:a="http://schemas.openxmlformats.org/drawingml/2006/main">
               <a:ext uri="{FF2B5EF4-FFF2-40B4-BE49-F238E27FC236}">
-                <a16:creationId xmlns:a16="http://schemas.microsoft.com/office/drawing/2014/main" id="{D6C0E885-07E1-48C4-BC91-09C42B29E87B}"/>
+                <a16:creationId xmlns:a16="http://schemas.microsoft.com/office/drawing/2014/main" id="{C08E8652-F4CC-47FB-8381-320246C85D61}"/>
               </a:ext>
             </a:extLst>
           </p:cNvPr>
@@ -10583,7 +10591,7 @@
           <p:cNvPr id="12" name="">
             <a:extLst xmlns:a="http://schemas.openxmlformats.org/drawingml/2006/main">
               <a:ext uri="{FF2B5EF4-FFF2-40B4-BE49-F238E27FC236}">
-                <a16:creationId xmlns:a16="http://schemas.microsoft.com/office/drawing/2014/main" id="{9E46FC3A-5AC3-40B0-8C9B-0DD0FF45FEDA}"/>
+                <a16:creationId xmlns:a16="http://schemas.microsoft.com/office/drawing/2014/main" id="{DB6E1DD1-AD73-497C-9CAC-A968883ACD9C}"/>
               </a:ext>
             </a:extLst>
           </p:cNvPr>
@@ -10640,7 +10648,7 @@
           <p:cNvPr id="13" name="">
             <a:extLst xmlns:a="http://schemas.openxmlformats.org/drawingml/2006/main">
               <a:ext uri="{FF2B5EF4-FFF2-40B4-BE49-F238E27FC236}">
-                <a16:creationId xmlns:a16="http://schemas.microsoft.com/office/drawing/2014/main" id="{D1EC0A60-6766-48EF-9948-0F2AF2591924}"/>
+                <a16:creationId xmlns:a16="http://schemas.microsoft.com/office/drawing/2014/main" id="{07DDE96E-2A5E-488B-90F3-3B49B20360A0}"/>
               </a:ext>
             </a:extLst>
           </p:cNvPr>
@@ -10697,7 +10705,7 @@
           <p:cNvPr id="14" name="">
             <a:extLst xmlns:a="http://schemas.openxmlformats.org/drawingml/2006/main">
               <a:ext uri="{FF2B5EF4-FFF2-40B4-BE49-F238E27FC236}">
-                <a16:creationId xmlns:a16="http://schemas.microsoft.com/office/drawing/2014/main" id="{35ADD85D-DD83-434C-8B54-171CB8010F95}"/>
+                <a16:creationId xmlns:a16="http://schemas.microsoft.com/office/drawing/2014/main" id="{083489D0-3DAD-4696-AB92-F1D72B587BF7}"/>
               </a:ext>
             </a:extLst>
           </p:cNvPr>
@@ -10754,7 +10762,7 @@
           <p:cNvPr id="15" name="">
             <a:extLst xmlns:a="http://schemas.openxmlformats.org/drawingml/2006/main">
               <a:ext uri="{FF2B5EF4-FFF2-40B4-BE49-F238E27FC236}">
-                <a16:creationId xmlns:a16="http://schemas.microsoft.com/office/drawing/2014/main" id="{F55B4179-E934-433D-9D89-D4C4915BFAE9}"/>
+                <a16:creationId xmlns:a16="http://schemas.microsoft.com/office/drawing/2014/main" id="{5996269E-E253-40D7-B45F-A320E64F347A}"/>
               </a:ext>
             </a:extLst>
           </p:cNvPr>
@@ -10809,7 +10817,7 @@
     </p:spTree>
     <p:extLst>
       <p:ext uri="{BB962C8B-B14F-4D97-AF65-F5344CB8AC3E}">
-        <p14:creationId xmlns:p14="http://schemas.microsoft.com/office/powerpoint/2010/main" val="701621764"/>
+        <p14:creationId xmlns:p14="http://schemas.microsoft.com/office/powerpoint/2010/main" val="554116106"/>
       </p:ext>
     </p:extLst>
   </p:cSld>
@@ -10964,7 +10972,7 @@
           <p:cNvPr id="16" name="">
             <a:extLst xmlns:a="http://schemas.openxmlformats.org/drawingml/2006/main">
               <a:ext uri="{FF2B5EF4-FFF2-40B4-BE49-F238E27FC236}">
-                <a16:creationId xmlns:a16="http://schemas.microsoft.com/office/drawing/2014/main" id="{E70E9582-8296-492C-B1DA-299D88D71AFA}"/>
+                <a16:creationId xmlns:a16="http://schemas.microsoft.com/office/drawing/2014/main" id="{04268E52-75D3-4CE9-9DF6-F6364528BABE}"/>
               </a:ext>
             </a:extLst>
           </p:cNvPr>
@@ -10996,7 +11004,7 @@
           <p:cNvPr id="2" name="">
             <a:extLst xmlns:a="http://schemas.openxmlformats.org/drawingml/2006/main">
               <a:ext uri="{FF2B5EF4-FFF2-40B4-BE49-F238E27FC236}">
-                <a16:creationId xmlns:a16="http://schemas.microsoft.com/office/drawing/2014/main" id="{20113DB6-1A89-466D-9538-04739456BFE4}"/>
+                <a16:creationId xmlns:a16="http://schemas.microsoft.com/office/drawing/2014/main" id="{D4580A00-CA56-4AA7-B51F-9A679F0AA7F5}"/>
               </a:ext>
             </a:extLst>
           </p:cNvPr>
@@ -11053,7 +11061,7 @@
           <p:cNvPr id="3" name="">
             <a:extLst xmlns:a="http://schemas.openxmlformats.org/drawingml/2006/main">
               <a:ext uri="{FF2B5EF4-FFF2-40B4-BE49-F238E27FC236}">
-                <a16:creationId xmlns:a16="http://schemas.microsoft.com/office/drawing/2014/main" id="{912963C9-E6C1-4E7E-ADDF-8F0EEB825695}"/>
+                <a16:creationId xmlns:a16="http://schemas.microsoft.com/office/drawing/2014/main" id="{9B854895-8F89-4B05-B83F-7ED6580527A4}"/>
               </a:ext>
             </a:extLst>
           </p:cNvPr>
@@ -11085,7 +11093,7 @@
           <p:cNvPr id="4" name="">
             <a:extLst xmlns:a="http://schemas.openxmlformats.org/drawingml/2006/main">
               <a:ext uri="{FF2B5EF4-FFF2-40B4-BE49-F238E27FC236}">
-                <a16:creationId xmlns:a16="http://schemas.microsoft.com/office/drawing/2014/main" id="{24A6A9D2-E637-480C-8F0C-2BE5D4E2C91B}"/>
+                <a16:creationId xmlns:a16="http://schemas.microsoft.com/office/drawing/2014/main" id="{2B62AE3B-4629-4497-A09F-D60E7092F021}"/>
               </a:ext>
             </a:extLst>
           </p:cNvPr>
@@ -11142,7 +11150,7 @@
           <p:cNvPr id="5" name="">
             <a:extLst xmlns:a="http://schemas.openxmlformats.org/drawingml/2006/main">
               <a:ext uri="{FF2B5EF4-FFF2-40B4-BE49-F238E27FC236}">
-                <a16:creationId xmlns:a16="http://schemas.microsoft.com/office/drawing/2014/main" id="{6BBA55AE-F665-484D-AA24-F1AE56B384AA}"/>
+                <a16:creationId xmlns:a16="http://schemas.microsoft.com/office/drawing/2014/main" id="{DB5A9212-9A2A-4FF3-A971-B14D56B3595A}"/>
               </a:ext>
             </a:extLst>
           </p:cNvPr>
@@ -11199,7 +11207,7 @@
           <p:cNvPr id="6" name="">
             <a:extLst xmlns:a="http://schemas.openxmlformats.org/drawingml/2006/main">
               <a:ext uri="{FF2B5EF4-FFF2-40B4-BE49-F238E27FC236}">
-                <a16:creationId xmlns:a16="http://schemas.microsoft.com/office/drawing/2014/main" id="{9CAE18D6-5CFD-42DC-A0E8-69DA5662CC45}"/>
+                <a16:creationId xmlns:a16="http://schemas.microsoft.com/office/drawing/2014/main" id="{EEB3360A-A7A1-4889-BA71-412A902F8DB6}"/>
               </a:ext>
             </a:extLst>
           </p:cNvPr>
@@ -11256,7 +11264,7 @@
           <p:cNvPr id="7" name="">
             <a:extLst xmlns:a="http://schemas.openxmlformats.org/drawingml/2006/main">
               <a:ext uri="{FF2B5EF4-FFF2-40B4-BE49-F238E27FC236}">
-                <a16:creationId xmlns:a16="http://schemas.microsoft.com/office/drawing/2014/main" id="{7DCEFB75-A085-4C37-A6C1-D4C3244485D4}"/>
+                <a16:creationId xmlns:a16="http://schemas.microsoft.com/office/drawing/2014/main" id="{DE3AC76E-2896-4AFE-A98D-98444345A276}"/>
               </a:ext>
             </a:extLst>
           </p:cNvPr>
@@ -11288,7 +11296,7 @@
           <p:cNvPr id="8" name="">
             <a:extLst xmlns:a="http://schemas.openxmlformats.org/drawingml/2006/main">
               <a:ext uri="{FF2B5EF4-FFF2-40B4-BE49-F238E27FC236}">
-                <a16:creationId xmlns:a16="http://schemas.microsoft.com/office/drawing/2014/main" id="{83EC7017-5674-4B7A-BD2A-3A02AC28CF48}"/>
+                <a16:creationId xmlns:a16="http://schemas.microsoft.com/office/drawing/2014/main" id="{CC87B12A-1850-47F0-B1B8-07E7F9B7DFAA}"/>
               </a:ext>
             </a:extLst>
           </p:cNvPr>
@@ -11345,7 +11353,7 @@
           <p:cNvPr id="9" name="">
             <a:extLst xmlns:a="http://schemas.openxmlformats.org/drawingml/2006/main">
               <a:ext uri="{FF2B5EF4-FFF2-40B4-BE49-F238E27FC236}">
-                <a16:creationId xmlns:a16="http://schemas.microsoft.com/office/drawing/2014/main" id="{220ECE2C-A1AD-45AB-B7E0-0C55724B8DDC}"/>
+                <a16:creationId xmlns:a16="http://schemas.microsoft.com/office/drawing/2014/main" id="{33AC628A-AF76-48CD-9A6B-47F040250D69}"/>
               </a:ext>
             </a:extLst>
           </p:cNvPr>
@@ -11406,7 +11414,7 @@
           <p:nvPr/>
         </p:nvPicPr>
         <p:blipFill>
-          <a:blip xmlns:r="http://schemas.openxmlformats.org/officeDocument/2006/relationships" xmlns:a="http://schemas.openxmlformats.org/drawingml/2006/main" r:embed="R9bcfd6c868be4c51"/>
+          <a:blip xmlns:r="http://schemas.openxmlformats.org/officeDocument/2006/relationships" xmlns:a="http://schemas.openxmlformats.org/drawingml/2006/main" r:embed="R7e8d772645894dfb"/>
           <a:stretch xmlns:a="http://schemas.openxmlformats.org/drawingml/2006/main"/>
         </p:blipFill>
         <p:spPr>
@@ -11424,7 +11432,7 @@
           <p:cNvPr id="11" name="">
             <a:extLst xmlns:a="http://schemas.openxmlformats.org/drawingml/2006/main">
               <a:ext uri="{FF2B5EF4-FFF2-40B4-BE49-F238E27FC236}">
-                <a16:creationId xmlns:a16="http://schemas.microsoft.com/office/drawing/2014/main" id="{25E3F498-86E0-4CBB-8DB0-976E140016CC}"/>
+                <a16:creationId xmlns:a16="http://schemas.microsoft.com/office/drawing/2014/main" id="{FBEBAEDB-0D35-4511-8E99-3DCE0F84F078}"/>
               </a:ext>
             </a:extLst>
           </p:cNvPr>
@@ -11481,7 +11489,7 @@
           <p:cNvPr id="12" name="">
             <a:extLst xmlns:a="http://schemas.openxmlformats.org/drawingml/2006/main">
               <a:ext uri="{FF2B5EF4-FFF2-40B4-BE49-F238E27FC236}">
-                <a16:creationId xmlns:a16="http://schemas.microsoft.com/office/drawing/2014/main" id="{404D1FD1-F4C1-4626-8B30-7137E0903219}"/>
+                <a16:creationId xmlns:a16="http://schemas.microsoft.com/office/drawing/2014/main" id="{FE033FB0-9FD4-4DC3-99CA-A1C9428002DA}"/>
               </a:ext>
             </a:extLst>
           </p:cNvPr>
@@ -11538,7 +11546,7 @@
           <p:cNvPr id="13" name="">
             <a:extLst xmlns:a="http://schemas.openxmlformats.org/drawingml/2006/main">
               <a:ext uri="{FF2B5EF4-FFF2-40B4-BE49-F238E27FC236}">
-                <a16:creationId xmlns:a16="http://schemas.microsoft.com/office/drawing/2014/main" id="{29595CD1-1F0B-4BA8-B4CB-2DD5A5CFC124}"/>
+                <a16:creationId xmlns:a16="http://schemas.microsoft.com/office/drawing/2014/main" id="{7CE40AB1-CDDB-4294-BF33-5731B078D5E8}"/>
               </a:ext>
             </a:extLst>
           </p:cNvPr>
@@ -11570,7 +11578,7 @@
           <p:cNvPr id="14" name="">
             <a:extLst xmlns:a="http://schemas.openxmlformats.org/drawingml/2006/main">
               <a:ext uri="{FF2B5EF4-FFF2-40B4-BE49-F238E27FC236}">
-                <a16:creationId xmlns:a16="http://schemas.microsoft.com/office/drawing/2014/main" id="{24519754-5334-421B-B4A5-61A6E55ECC4B}"/>
+                <a16:creationId xmlns:a16="http://schemas.microsoft.com/office/drawing/2014/main" id="{F11C97D3-E77D-499A-8C32-3D361445489A}"/>
               </a:ext>
             </a:extLst>
           </p:cNvPr>
@@ -11627,7 +11635,7 @@
           <p:cNvPr id="15" name="">
             <a:extLst xmlns:a="http://schemas.openxmlformats.org/drawingml/2006/main">
               <a:ext uri="{FF2B5EF4-FFF2-40B4-BE49-F238E27FC236}">
-                <a16:creationId xmlns:a16="http://schemas.microsoft.com/office/drawing/2014/main" id="{737243A5-7421-4959-9A96-674726C2F665}"/>
+                <a16:creationId xmlns:a16="http://schemas.microsoft.com/office/drawing/2014/main" id="{CE91F5A8-7971-4EBE-B2E7-795DE5003C1A}"/>
               </a:ext>
             </a:extLst>
           </p:cNvPr>
@@ -11682,7 +11690,7 @@
     </p:spTree>
     <p:extLst>
       <p:ext uri="{BB962C8B-B14F-4D97-AF65-F5344CB8AC3E}">
-        <p14:creationId xmlns:p14="http://schemas.microsoft.com/office/powerpoint/2010/main" val="843473043"/>
+        <p14:creationId xmlns:p14="http://schemas.microsoft.com/office/powerpoint/2010/main" val="758935366"/>
       </p:ext>
     </p:extLst>
   </p:cSld>
@@ -11837,7 +11845,7 @@
           <p:cNvPr id="23" name="">
             <a:extLst xmlns:a="http://schemas.openxmlformats.org/drawingml/2006/main">
               <a:ext uri="{FF2B5EF4-FFF2-40B4-BE49-F238E27FC236}">
-                <a16:creationId xmlns:a16="http://schemas.microsoft.com/office/drawing/2014/main" id="{4FE4B2EB-845E-47D2-8BD0-781BFA0604DC}"/>
+                <a16:creationId xmlns:a16="http://schemas.microsoft.com/office/drawing/2014/main" id="{0CFC2FB9-5F9A-4033-B912-242C5B9C98C6}"/>
               </a:ext>
             </a:extLst>
           </p:cNvPr>
@@ -11869,7 +11877,7 @@
           <p:cNvPr id="2" name="">
             <a:extLst xmlns:a="http://schemas.openxmlformats.org/drawingml/2006/main">
               <a:ext uri="{FF2B5EF4-FFF2-40B4-BE49-F238E27FC236}">
-                <a16:creationId xmlns:a16="http://schemas.microsoft.com/office/drawing/2014/main" id="{4E9FE241-98C2-43A5-A9AE-7CF70C3EBB41}"/>
+                <a16:creationId xmlns:a16="http://schemas.microsoft.com/office/drawing/2014/main" id="{FF87093F-F8B5-413D-8581-63BC2EB5A812}"/>
               </a:ext>
             </a:extLst>
           </p:cNvPr>
@@ -11926,7 +11934,7 @@
           <p:cNvPr id="3" name="">
             <a:extLst xmlns:a="http://schemas.openxmlformats.org/drawingml/2006/main">
               <a:ext uri="{FF2B5EF4-FFF2-40B4-BE49-F238E27FC236}">
-                <a16:creationId xmlns:a16="http://schemas.microsoft.com/office/drawing/2014/main" id="{06816D9F-995E-4C18-8594-C8009CC843A1}"/>
+                <a16:creationId xmlns:a16="http://schemas.microsoft.com/office/drawing/2014/main" id="{4E7A22B9-02D5-43F3-A172-A535F1C84957}"/>
               </a:ext>
             </a:extLst>
           </p:cNvPr>
@@ -11958,7 +11966,7 @@
           <p:cNvPr id="4" name="">
             <a:extLst xmlns:a="http://schemas.openxmlformats.org/drawingml/2006/main">
               <a:ext uri="{FF2B5EF4-FFF2-40B4-BE49-F238E27FC236}">
-                <a16:creationId xmlns:a16="http://schemas.microsoft.com/office/drawing/2014/main" id="{460530A4-D44C-45F3-9EAD-F70BEC6B854A}"/>
+                <a16:creationId xmlns:a16="http://schemas.microsoft.com/office/drawing/2014/main" id="{CEB09211-414D-455F-9BFF-FC3F9BCD5823}"/>
               </a:ext>
             </a:extLst>
           </p:cNvPr>
@@ -12015,7 +12023,7 @@
           <p:cNvPr id="5" name="">
             <a:extLst xmlns:a="http://schemas.openxmlformats.org/drawingml/2006/main">
               <a:ext uri="{FF2B5EF4-FFF2-40B4-BE49-F238E27FC236}">
-                <a16:creationId xmlns:a16="http://schemas.microsoft.com/office/drawing/2014/main" id="{1791FA34-9243-4DE9-8719-A64353044ADB}"/>
+                <a16:creationId xmlns:a16="http://schemas.microsoft.com/office/drawing/2014/main" id="{3B8A646E-34AF-4291-8A81-EF53AF86338E}"/>
               </a:ext>
             </a:extLst>
           </p:cNvPr>
@@ -12072,7 +12080,7 @@
           <p:cNvPr id="6" name="">
             <a:extLst xmlns:a="http://schemas.openxmlformats.org/drawingml/2006/main">
               <a:ext uri="{FF2B5EF4-FFF2-40B4-BE49-F238E27FC236}">
-                <a16:creationId xmlns:a16="http://schemas.microsoft.com/office/drawing/2014/main" id="{7D3C8E6C-C63A-4818-AB92-5C5FE85BC2F5}"/>
+                <a16:creationId xmlns:a16="http://schemas.microsoft.com/office/drawing/2014/main" id="{EC678139-C6B8-4EF1-A30A-F96DC7E6D416}"/>
               </a:ext>
             </a:extLst>
           </p:cNvPr>
@@ -12129,7 +12137,7 @@
           <p:cNvPr id="7" name="">
             <a:extLst xmlns:a="http://schemas.openxmlformats.org/drawingml/2006/main">
               <a:ext uri="{FF2B5EF4-FFF2-40B4-BE49-F238E27FC236}">
-                <a16:creationId xmlns:a16="http://schemas.microsoft.com/office/drawing/2014/main" id="{F4D9A96D-9AD3-453A-87B2-04D72D762EF8}"/>
+                <a16:creationId xmlns:a16="http://schemas.microsoft.com/office/drawing/2014/main" id="{1B8569ED-65FC-4FAC-B82F-49D7085D8107}"/>
               </a:ext>
             </a:extLst>
           </p:cNvPr>
@@ -12161,7 +12169,7 @@
           <p:cNvPr id="8" name="">
             <a:extLst xmlns:a="http://schemas.openxmlformats.org/drawingml/2006/main">
               <a:ext uri="{FF2B5EF4-FFF2-40B4-BE49-F238E27FC236}">
-                <a16:creationId xmlns:a16="http://schemas.microsoft.com/office/drawing/2014/main" id="{BAE14F74-E9A3-401E-9DF8-CDDE1C2AF3C8}"/>
+                <a16:creationId xmlns:a16="http://schemas.microsoft.com/office/drawing/2014/main" id="{0620CA7C-223E-4C6F-923A-F21F17A7E90C}"/>
               </a:ext>
             </a:extLst>
           </p:cNvPr>
@@ -12218,7 +12226,7 @@
           <p:cNvPr id="9" name="">
             <a:extLst xmlns:a="http://schemas.openxmlformats.org/drawingml/2006/main">
               <a:ext uri="{FF2B5EF4-FFF2-40B4-BE49-F238E27FC236}">
-                <a16:creationId xmlns:a16="http://schemas.microsoft.com/office/drawing/2014/main" id="{08818ECC-8978-4DD1-97A3-9866E94CDEDF}"/>
+                <a16:creationId xmlns:a16="http://schemas.microsoft.com/office/drawing/2014/main" id="{AF8CCB24-0448-49B5-A50A-374A45E193C2}"/>
               </a:ext>
             </a:extLst>
           </p:cNvPr>
@@ -12275,7 +12283,7 @@
           <p:cNvPr id="10" name="">
             <a:extLst xmlns:a="http://schemas.openxmlformats.org/drawingml/2006/main">
               <a:ext uri="{FF2B5EF4-FFF2-40B4-BE49-F238E27FC236}">
-                <a16:creationId xmlns:a16="http://schemas.microsoft.com/office/drawing/2014/main" id="{1871C2B0-0678-4D17-BF1D-8FB90FA8E09D}"/>
+                <a16:creationId xmlns:a16="http://schemas.microsoft.com/office/drawing/2014/main" id="{A5D9797A-FEF2-48D1-A265-D9EAC72BF84F}"/>
               </a:ext>
             </a:extLst>
           </p:cNvPr>
@@ -12309,7 +12317,7 @@
           <p:cNvPr id="11" name="">
             <a:extLst xmlns:a="http://schemas.openxmlformats.org/drawingml/2006/main">
               <a:ext uri="{FF2B5EF4-FFF2-40B4-BE49-F238E27FC236}">
-                <a16:creationId xmlns:a16="http://schemas.microsoft.com/office/drawing/2014/main" id="{00F02DDD-7175-4EE3-8042-24B3EEA09671}"/>
+                <a16:creationId xmlns:a16="http://schemas.microsoft.com/office/drawing/2014/main" id="{17E0D141-5DA7-4E0B-9F34-023AE280A818}"/>
               </a:ext>
             </a:extLst>
           </p:cNvPr>
@@ -12341,7 +12349,7 @@
           <p:cNvPr id="12" name="">
             <a:extLst xmlns:a="http://schemas.openxmlformats.org/drawingml/2006/main">
               <a:ext uri="{FF2B5EF4-FFF2-40B4-BE49-F238E27FC236}">
-                <a16:creationId xmlns:a16="http://schemas.microsoft.com/office/drawing/2014/main" id="{596BCAD2-3300-4593-8044-F1FF2286DA12}"/>
+                <a16:creationId xmlns:a16="http://schemas.microsoft.com/office/drawing/2014/main" id="{0E8E8329-FCC3-48C5-A1EE-F6AD4FD21246}"/>
               </a:ext>
             </a:extLst>
           </p:cNvPr>
@@ -12398,7 +12406,7 @@
           <p:cNvPr id="13" name="">
             <a:extLst xmlns:a="http://schemas.openxmlformats.org/drawingml/2006/main">
               <a:ext uri="{FF2B5EF4-FFF2-40B4-BE49-F238E27FC236}">
-                <a16:creationId xmlns:a16="http://schemas.microsoft.com/office/drawing/2014/main" id="{77CFA01E-CCF9-4169-ACB8-323D3D075F6C}"/>
+                <a16:creationId xmlns:a16="http://schemas.microsoft.com/office/drawing/2014/main" id="{9D235FAB-B5BF-474E-A558-902841169DF6}"/>
               </a:ext>
             </a:extLst>
           </p:cNvPr>
@@ -12455,7 +12463,7 @@
           <p:cNvPr id="14" name="">
             <a:extLst xmlns:a="http://schemas.openxmlformats.org/drawingml/2006/main">
               <a:ext uri="{FF2B5EF4-FFF2-40B4-BE49-F238E27FC236}">
-                <a16:creationId xmlns:a16="http://schemas.microsoft.com/office/drawing/2014/main" id="{55490791-3EDC-47BE-B599-22F5070898B0}"/>
+                <a16:creationId xmlns:a16="http://schemas.microsoft.com/office/drawing/2014/main" id="{9ECF2774-5B4C-492F-91D1-73E437AC63D9}"/>
               </a:ext>
             </a:extLst>
           </p:cNvPr>
@@ -12489,7 +12497,7 @@
           <p:cNvPr id="15" name="">
             <a:extLst xmlns:a="http://schemas.openxmlformats.org/drawingml/2006/main">
               <a:ext uri="{FF2B5EF4-FFF2-40B4-BE49-F238E27FC236}">
-                <a16:creationId xmlns:a16="http://schemas.microsoft.com/office/drawing/2014/main" id="{1DB100E2-20BE-4750-800B-4513F771E4E0}"/>
+                <a16:creationId xmlns:a16="http://schemas.microsoft.com/office/drawing/2014/main" id="{43ED70A1-AF66-45E7-80CF-75860C5281D6}"/>
               </a:ext>
             </a:extLst>
           </p:cNvPr>
@@ -12521,7 +12529,7 @@
           <p:cNvPr id="16" name="">
             <a:extLst xmlns:a="http://schemas.openxmlformats.org/drawingml/2006/main">
               <a:ext uri="{FF2B5EF4-FFF2-40B4-BE49-F238E27FC236}">
-                <a16:creationId xmlns:a16="http://schemas.microsoft.com/office/drawing/2014/main" id="{FEF932B2-550C-45C5-A5EE-E4CB2929539E}"/>
+                <a16:creationId xmlns:a16="http://schemas.microsoft.com/office/drawing/2014/main" id="{CCA803AD-ABE9-47C9-AC0F-70CE3718D4B5}"/>
               </a:ext>
             </a:extLst>
           </p:cNvPr>
@@ -12578,7 +12586,7 @@
           <p:cNvPr id="17" name="">
             <a:extLst xmlns:a="http://schemas.openxmlformats.org/drawingml/2006/main">
               <a:ext uri="{FF2B5EF4-FFF2-40B4-BE49-F238E27FC236}">
-                <a16:creationId xmlns:a16="http://schemas.microsoft.com/office/drawing/2014/main" id="{35A3B43A-F2BD-4931-BF7B-AC466251207F}"/>
+                <a16:creationId xmlns:a16="http://schemas.microsoft.com/office/drawing/2014/main" id="{5E89EBF4-2935-4B80-ACB7-4469CB3D9C74}"/>
               </a:ext>
             </a:extLst>
           </p:cNvPr>
@@ -12635,7 +12643,7 @@
           <p:cNvPr id="18" name="">
             <a:extLst xmlns:a="http://schemas.openxmlformats.org/drawingml/2006/main">
               <a:ext uri="{FF2B5EF4-FFF2-40B4-BE49-F238E27FC236}">
-                <a16:creationId xmlns:a16="http://schemas.microsoft.com/office/drawing/2014/main" id="{D9751432-74FB-4C1D-8629-26DFFE83D78B}"/>
+                <a16:creationId xmlns:a16="http://schemas.microsoft.com/office/drawing/2014/main" id="{118E9732-02B1-461C-973C-F0899D782910}"/>
               </a:ext>
             </a:extLst>
           </p:cNvPr>
@@ -12669,7 +12677,7 @@
           <p:cNvPr id="19" name="">
             <a:extLst xmlns:a="http://schemas.openxmlformats.org/drawingml/2006/main">
               <a:ext uri="{FF2B5EF4-FFF2-40B4-BE49-F238E27FC236}">
-                <a16:creationId xmlns:a16="http://schemas.microsoft.com/office/drawing/2014/main" id="{9B9426A0-FD09-4ADA-B50C-753E0FBB57B6}"/>
+                <a16:creationId xmlns:a16="http://schemas.microsoft.com/office/drawing/2014/main" id="{EFB654C6-05AC-465F-8C6C-8F83C984960E}"/>
               </a:ext>
             </a:extLst>
           </p:cNvPr>
@@ -12701,7 +12709,7 @@
           <p:cNvPr id="20" name="">
             <a:extLst xmlns:a="http://schemas.openxmlformats.org/drawingml/2006/main">
               <a:ext uri="{FF2B5EF4-FFF2-40B4-BE49-F238E27FC236}">
-                <a16:creationId xmlns:a16="http://schemas.microsoft.com/office/drawing/2014/main" id="{E0C6E8ED-00E0-4646-BC5B-18BBD03FD680}"/>
+                <a16:creationId xmlns:a16="http://schemas.microsoft.com/office/drawing/2014/main" id="{86861B94-E098-4205-ADC7-1AACD9BBF50F}"/>
               </a:ext>
             </a:extLst>
           </p:cNvPr>
@@ -12758,7 +12766,7 @@
           <p:cNvPr id="21" name="">
             <a:extLst xmlns:a="http://schemas.openxmlformats.org/drawingml/2006/main">
               <a:ext uri="{FF2B5EF4-FFF2-40B4-BE49-F238E27FC236}">
-                <a16:creationId xmlns:a16="http://schemas.microsoft.com/office/drawing/2014/main" id="{208C0818-9AEA-49D0-B40F-C01B6A8571C6}"/>
+                <a16:creationId xmlns:a16="http://schemas.microsoft.com/office/drawing/2014/main" id="{B9170532-CFAD-4A21-8DCF-E6B3B47FB75B}"/>
               </a:ext>
             </a:extLst>
           </p:cNvPr>
@@ -12815,7 +12823,7 @@
           <p:cNvPr id="22" name="">
             <a:extLst xmlns:a="http://schemas.openxmlformats.org/drawingml/2006/main">
               <a:ext uri="{FF2B5EF4-FFF2-40B4-BE49-F238E27FC236}">
-                <a16:creationId xmlns:a16="http://schemas.microsoft.com/office/drawing/2014/main" id="{1ACE7796-42B3-4347-9FAC-8605204D7AA4}"/>
+                <a16:creationId xmlns:a16="http://schemas.microsoft.com/office/drawing/2014/main" id="{E258A8DB-450C-4626-9ADE-8FEC7836FA0B}"/>
               </a:ext>
             </a:extLst>
           </p:cNvPr>
@@ -12870,7 +12878,7 @@
     </p:spTree>
     <p:extLst>
       <p:ext uri="{BB962C8B-B14F-4D97-AF65-F5344CB8AC3E}">
-        <p14:creationId xmlns:p14="http://schemas.microsoft.com/office/powerpoint/2010/main" val="482481152"/>
+        <p14:creationId xmlns:p14="http://schemas.microsoft.com/office/powerpoint/2010/main" val="1106545116"/>
       </p:ext>
     </p:extLst>
   </p:cSld>
@@ -13071,7 +13079,7 @@
           <p:cNvPr id="22" name="">
             <a:extLst xmlns:a="http://schemas.openxmlformats.org/drawingml/2006/main">
               <a:ext uri="{FF2B5EF4-FFF2-40B4-BE49-F238E27FC236}">
-                <a16:creationId xmlns:a16="http://schemas.microsoft.com/office/drawing/2014/main" id="{B90FB0E7-5D66-4869-9D26-757B0767DB31}"/>
+                <a16:creationId xmlns:a16="http://schemas.microsoft.com/office/drawing/2014/main" id="{C63634D9-B5AE-4FA4-84CE-62FEE9058B55}"/>
               </a:ext>
             </a:extLst>
           </p:cNvPr>
@@ -13103,7 +13111,7 @@
           <p:cNvPr id="2" name="">
             <a:extLst xmlns:a="http://schemas.openxmlformats.org/drawingml/2006/main">
               <a:ext uri="{FF2B5EF4-FFF2-40B4-BE49-F238E27FC236}">
-                <a16:creationId xmlns:a16="http://schemas.microsoft.com/office/drawing/2014/main" id="{4F67B65A-D5FD-4F82-9361-6D9F2575FD12}"/>
+                <a16:creationId xmlns:a16="http://schemas.microsoft.com/office/drawing/2014/main" id="{1BA14FA6-C830-4B6F-B248-E8B300518D6F}"/>
               </a:ext>
             </a:extLst>
           </p:cNvPr>
@@ -13160,7 +13168,7 @@
           <p:cNvPr id="3" name="">
             <a:extLst xmlns:a="http://schemas.openxmlformats.org/drawingml/2006/main">
               <a:ext uri="{FF2B5EF4-FFF2-40B4-BE49-F238E27FC236}">
-                <a16:creationId xmlns:a16="http://schemas.microsoft.com/office/drawing/2014/main" id="{14A19A2B-C875-42DD-9BFF-BBD20340BFE3}"/>
+                <a16:creationId xmlns:a16="http://schemas.microsoft.com/office/drawing/2014/main" id="{DB4CBB1C-1B19-4B32-AEF4-6B56062A12A2}"/>
               </a:ext>
             </a:extLst>
           </p:cNvPr>
@@ -13192,7 +13200,7 @@
           <p:cNvPr id="4" name="">
             <a:extLst xmlns:a="http://schemas.openxmlformats.org/drawingml/2006/main">
               <a:ext uri="{FF2B5EF4-FFF2-40B4-BE49-F238E27FC236}">
-                <a16:creationId xmlns:a16="http://schemas.microsoft.com/office/drawing/2014/main" id="{50D2ACE5-1259-4393-9A56-163710F79FEA}"/>
+                <a16:creationId xmlns:a16="http://schemas.microsoft.com/office/drawing/2014/main" id="{4D7C261E-AF2B-4A24-82BC-0F1961E3DF61}"/>
               </a:ext>
             </a:extLst>
           </p:cNvPr>
@@ -13249,7 +13257,7 @@
           <p:cNvPr id="5" name="">
             <a:extLst xmlns:a="http://schemas.openxmlformats.org/drawingml/2006/main">
               <a:ext uri="{FF2B5EF4-FFF2-40B4-BE49-F238E27FC236}">
-                <a16:creationId xmlns:a16="http://schemas.microsoft.com/office/drawing/2014/main" id="{729ED35F-4CA8-4213-A40A-D91A6517F8A8}"/>
+                <a16:creationId xmlns:a16="http://schemas.microsoft.com/office/drawing/2014/main" id="{5E3F20F3-5887-4FC4-8E4D-F7277A74AC20}"/>
               </a:ext>
             </a:extLst>
           </p:cNvPr>
@@ -13306,7 +13314,7 @@
           <p:cNvPr id="6" name="">
             <a:extLst xmlns:a="http://schemas.openxmlformats.org/drawingml/2006/main">
               <a:ext uri="{FF2B5EF4-FFF2-40B4-BE49-F238E27FC236}">
-                <a16:creationId xmlns:a16="http://schemas.microsoft.com/office/drawing/2014/main" id="{50F86826-E0A1-46EA-A73B-78417B8D9894}"/>
+                <a16:creationId xmlns:a16="http://schemas.microsoft.com/office/drawing/2014/main" id="{DE0D9631-6064-44D4-89CB-DE936BC48B97}"/>
               </a:ext>
             </a:extLst>
           </p:cNvPr>
@@ -13363,7 +13371,7 @@
           <p:cNvPr id="7" name="">
             <a:extLst xmlns:a="http://schemas.openxmlformats.org/drawingml/2006/main">
               <a:ext uri="{FF2B5EF4-FFF2-40B4-BE49-F238E27FC236}">
-                <a16:creationId xmlns:a16="http://schemas.microsoft.com/office/drawing/2014/main" id="{DFD33E11-EB67-4549-BC70-EAEBE11A88D9}"/>
+                <a16:creationId xmlns:a16="http://schemas.microsoft.com/office/drawing/2014/main" id="{9D9DEAAA-11C7-4C7E-A95D-2ADDCB56351C}"/>
               </a:ext>
             </a:extLst>
           </p:cNvPr>
@@ -13395,7 +13403,7 @@
           <p:cNvPr id="8" name="">
             <a:extLst xmlns:a="http://schemas.openxmlformats.org/drawingml/2006/main">
               <a:ext uri="{FF2B5EF4-FFF2-40B4-BE49-F238E27FC236}">
-                <a16:creationId xmlns:a16="http://schemas.microsoft.com/office/drawing/2014/main" id="{2B7BB4F3-4F1F-4F37-BB84-C5F6C5094AE0}"/>
+                <a16:creationId xmlns:a16="http://schemas.microsoft.com/office/drawing/2014/main" id="{11A45332-5663-4542-BBDC-BDB483D2D5FD}"/>
               </a:ext>
             </a:extLst>
           </p:cNvPr>
@@ -13452,7 +13460,7 @@
           <p:cNvPr id="9" name="">
             <a:extLst xmlns:a="http://schemas.openxmlformats.org/drawingml/2006/main">
               <a:ext uri="{FF2B5EF4-FFF2-40B4-BE49-F238E27FC236}">
-                <a16:creationId xmlns:a16="http://schemas.microsoft.com/office/drawing/2014/main" id="{3EDCEFAA-278D-4AE5-941F-672EBB4A9C0C}"/>
+                <a16:creationId xmlns:a16="http://schemas.microsoft.com/office/drawing/2014/main" id="{98C17AD2-DD7F-4398-B627-469432452773}"/>
               </a:ext>
             </a:extLst>
           </p:cNvPr>
@@ -13509,7 +13517,7 @@
           <p:cNvPr id="10" name="">
             <a:extLst xmlns:a="http://schemas.openxmlformats.org/drawingml/2006/main">
               <a:ext uri="{FF2B5EF4-FFF2-40B4-BE49-F238E27FC236}">
-                <a16:creationId xmlns:a16="http://schemas.microsoft.com/office/drawing/2014/main" id="{95835735-24AC-4CE0-A1F7-A6FBE38B5E89}"/>
+                <a16:creationId xmlns:a16="http://schemas.microsoft.com/office/drawing/2014/main" id="{58F5F990-F473-4747-9180-EBE8C2735E9C}"/>
               </a:ext>
             </a:extLst>
           </p:cNvPr>
@@ -13543,7 +13551,7 @@
           <p:cNvPr id="11" name="">
             <a:extLst xmlns:a="http://schemas.openxmlformats.org/drawingml/2006/main">
               <a:ext uri="{FF2B5EF4-FFF2-40B4-BE49-F238E27FC236}">
-                <a16:creationId xmlns:a16="http://schemas.microsoft.com/office/drawing/2014/main" id="{BBD3422F-2C93-4ED2-833F-BF21E21E1A5A}"/>
+                <a16:creationId xmlns:a16="http://schemas.microsoft.com/office/drawing/2014/main" id="{F28D6BAB-29EA-4764-881D-AA2EDDA3054A}"/>
               </a:ext>
             </a:extLst>
           </p:cNvPr>
@@ -13575,7 +13583,7 @@
           <p:cNvPr id="12" name="">
             <a:extLst xmlns:a="http://schemas.openxmlformats.org/drawingml/2006/main">
               <a:ext uri="{FF2B5EF4-FFF2-40B4-BE49-F238E27FC236}">
-                <a16:creationId xmlns:a16="http://schemas.microsoft.com/office/drawing/2014/main" id="{190B9992-2254-4D11-894D-9F73E6FA0B61}"/>
+                <a16:creationId xmlns:a16="http://schemas.microsoft.com/office/drawing/2014/main" id="{78AB3ADF-F425-4FD1-B604-19EF69FF1F3B}"/>
               </a:ext>
             </a:extLst>
           </p:cNvPr>
@@ -13632,7 +13640,7 @@
           <p:cNvPr id="13" name="">
             <a:extLst xmlns:a="http://schemas.openxmlformats.org/drawingml/2006/main">
               <a:ext uri="{FF2B5EF4-FFF2-40B4-BE49-F238E27FC236}">
-                <a16:creationId xmlns:a16="http://schemas.microsoft.com/office/drawing/2014/main" id="{FACBA9E3-A64E-4F60-8D60-E51A518FF9AE}"/>
+                <a16:creationId xmlns:a16="http://schemas.microsoft.com/office/drawing/2014/main" id="{0B7B3F8B-4792-4440-BB0F-B0C1731AFEFC}"/>
               </a:ext>
             </a:extLst>
           </p:cNvPr>
@@ -13689,7 +13697,7 @@
           <p:cNvPr id="14" name="">
             <a:extLst xmlns:a="http://schemas.openxmlformats.org/drawingml/2006/main">
               <a:ext uri="{FF2B5EF4-FFF2-40B4-BE49-F238E27FC236}">
-                <a16:creationId xmlns:a16="http://schemas.microsoft.com/office/drawing/2014/main" id="{7A96C587-2A93-485C-97B4-FE6A5B037BD7}"/>
+                <a16:creationId xmlns:a16="http://schemas.microsoft.com/office/drawing/2014/main" id="{7BFE2F81-B0BC-416E-BA99-1FEFCD4815C2}"/>
               </a:ext>
             </a:extLst>
           </p:cNvPr>
@@ -13723,7 +13731,7 @@
           <p:cNvPr id="15" name="">
             <a:extLst xmlns:a="http://schemas.openxmlformats.org/drawingml/2006/main">
               <a:ext uri="{FF2B5EF4-FFF2-40B4-BE49-F238E27FC236}">
-                <a16:creationId xmlns:a16="http://schemas.microsoft.com/office/drawing/2014/main" id="{995CFA1B-68B3-42F4-BCC6-CE9E0DC8111A}"/>
+                <a16:creationId xmlns:a16="http://schemas.microsoft.com/office/drawing/2014/main" id="{2CE14CE5-1F83-4F92-BA71-C1A6298CEDF3}"/>
               </a:ext>
             </a:extLst>
           </p:cNvPr>
@@ -13755,7 +13763,7 @@
           <p:cNvPr id="16" name="">
             <a:extLst xmlns:a="http://schemas.openxmlformats.org/drawingml/2006/main">
               <a:ext uri="{FF2B5EF4-FFF2-40B4-BE49-F238E27FC236}">
-                <a16:creationId xmlns:a16="http://schemas.microsoft.com/office/drawing/2014/main" id="{B5F372C5-9F5A-44D9-A638-B8FCFB0C06C3}"/>
+                <a16:creationId xmlns:a16="http://schemas.microsoft.com/office/drawing/2014/main" id="{E18A1789-7CAA-4252-AF87-C4263E012C55}"/>
               </a:ext>
             </a:extLst>
           </p:cNvPr>
@@ -13812,7 +13820,7 @@
           <p:cNvPr id="17" name="">
             <a:extLst xmlns:a="http://schemas.openxmlformats.org/drawingml/2006/main">
               <a:ext uri="{FF2B5EF4-FFF2-40B4-BE49-F238E27FC236}">
-                <a16:creationId xmlns:a16="http://schemas.microsoft.com/office/drawing/2014/main" id="{FC9F921E-CE81-4350-8F5B-364FEAEB4DC5}"/>
+                <a16:creationId xmlns:a16="http://schemas.microsoft.com/office/drawing/2014/main" id="{A62E49C0-69E1-4AC6-91E7-BBAC3C903EC5}"/>
               </a:ext>
             </a:extLst>
           </p:cNvPr>
@@ -13869,7 +13877,7 @@
           <p:cNvPr id="18" name="">
             <a:extLst xmlns:a="http://schemas.openxmlformats.org/drawingml/2006/main">
               <a:ext uri="{FF2B5EF4-FFF2-40B4-BE49-F238E27FC236}">
-                <a16:creationId xmlns:a16="http://schemas.microsoft.com/office/drawing/2014/main" id="{C12BA493-2562-40EC-BA53-E11C39652E80}"/>
+                <a16:creationId xmlns:a16="http://schemas.microsoft.com/office/drawing/2014/main" id="{09533B50-281C-4C46-BE72-5BDA0BB41D4B}"/>
               </a:ext>
             </a:extLst>
           </p:cNvPr>
@@ -13903,7 +13911,7 @@
           <p:cNvPr id="19" name="">
             <a:extLst xmlns:a="http://schemas.openxmlformats.org/drawingml/2006/main">
               <a:ext uri="{FF2B5EF4-FFF2-40B4-BE49-F238E27FC236}">
-                <a16:creationId xmlns:a16="http://schemas.microsoft.com/office/drawing/2014/main" id="{6AABE5B6-A94D-4336-B6F8-EDFA96C131E5}"/>
+                <a16:creationId xmlns:a16="http://schemas.microsoft.com/office/drawing/2014/main" id="{0D20FDA8-CEED-4FE5-AA83-9928ED443F38}"/>
               </a:ext>
             </a:extLst>
           </p:cNvPr>
@@ -13935,7 +13943,7 @@
           <p:cNvPr id="20" name="">
             <a:extLst xmlns:a="http://schemas.openxmlformats.org/drawingml/2006/main">
               <a:ext uri="{FF2B5EF4-FFF2-40B4-BE49-F238E27FC236}">
-                <a16:creationId xmlns:a16="http://schemas.microsoft.com/office/drawing/2014/main" id="{31AA7EF0-1FD7-4D65-B703-FA3C181C42E5}"/>
+                <a16:creationId xmlns:a16="http://schemas.microsoft.com/office/drawing/2014/main" id="{C2A1BC49-2100-4BF4-AD7D-ABBD6357363B}"/>
               </a:ext>
             </a:extLst>
           </p:cNvPr>
@@ -13992,7 +14000,7 @@
           <p:cNvPr id="21" name="">
             <a:extLst xmlns:a="http://schemas.openxmlformats.org/drawingml/2006/main">
               <a:ext uri="{FF2B5EF4-FFF2-40B4-BE49-F238E27FC236}">
-                <a16:creationId xmlns:a16="http://schemas.microsoft.com/office/drawing/2014/main" id="{4E391471-9E06-4E71-A9B0-11BAFDBDEF4B}"/>
+                <a16:creationId xmlns:a16="http://schemas.microsoft.com/office/drawing/2014/main" id="{121F230A-465E-4957-BEFB-F909F6C9563A}"/>
               </a:ext>
             </a:extLst>
           </p:cNvPr>
@@ -14047,7 +14055,7 @@
     </p:spTree>
     <p:extLst>
       <p:ext uri="{BB962C8B-B14F-4D97-AF65-F5344CB8AC3E}">
-        <p14:creationId xmlns:p14="http://schemas.microsoft.com/office/powerpoint/2010/main" val="1821004283"/>
+        <p14:creationId xmlns:p14="http://schemas.microsoft.com/office/powerpoint/2010/main" val="1373414386"/>
       </p:ext>
     </p:extLst>
   </p:cSld>
